--- a/LectureSlides/14_HierarchicalBayesModels.pptx
+++ b/LectureSlides/14_HierarchicalBayesModels.pptx
@@ -352,7 +352,7 @@
           <a:p>
             <a:fld id="{241EB5C9-1307-BA42-ABA2-0BC069CD8E7F}" type="datetimeFigureOut">
               <a:rPr lang="en-US" smtClean="0"/>
-              <a:t>12/4/2024</a:t>
+              <a:t>11/18/2025</a:t>
             </a:fld>
             <a:endParaRPr lang="en-US"/>
           </a:p>
@@ -520,7 +520,7 @@
           <a:p>
             <a:fld id="{241EB5C9-1307-BA42-ABA2-0BC069CD8E7F}" type="datetimeFigureOut">
               <a:rPr lang="en-US" smtClean="0"/>
-              <a:t>12/4/2024</a:t>
+              <a:t>11/18/2025</a:t>
             </a:fld>
             <a:endParaRPr lang="en-US"/>
           </a:p>
@@ -698,7 +698,7 @@
           <a:p>
             <a:fld id="{241EB5C9-1307-BA42-ABA2-0BC069CD8E7F}" type="datetimeFigureOut">
               <a:rPr lang="en-US" smtClean="0"/>
-              <a:t>12/4/2024</a:t>
+              <a:t>11/18/2025</a:t>
             </a:fld>
             <a:endParaRPr lang="en-US"/>
           </a:p>
@@ -866,7 +866,7 @@
           <a:p>
             <a:fld id="{241EB5C9-1307-BA42-ABA2-0BC069CD8E7F}" type="datetimeFigureOut">
               <a:rPr lang="en-US" smtClean="0"/>
-              <a:t>12/4/2024</a:t>
+              <a:t>11/18/2025</a:t>
             </a:fld>
             <a:endParaRPr lang="en-US"/>
           </a:p>
@@ -1111,7 +1111,7 @@
           <a:p>
             <a:fld id="{241EB5C9-1307-BA42-ABA2-0BC069CD8E7F}" type="datetimeFigureOut">
               <a:rPr lang="en-US" smtClean="0"/>
-              <a:t>12/4/2024</a:t>
+              <a:t>11/18/2025</a:t>
             </a:fld>
             <a:endParaRPr lang="en-US"/>
           </a:p>
@@ -1396,7 +1396,7 @@
           <a:p>
             <a:fld id="{241EB5C9-1307-BA42-ABA2-0BC069CD8E7F}" type="datetimeFigureOut">
               <a:rPr lang="en-US" smtClean="0"/>
-              <a:t>12/4/2024</a:t>
+              <a:t>11/18/2025</a:t>
             </a:fld>
             <a:endParaRPr lang="en-US"/>
           </a:p>
@@ -1815,7 +1815,7 @@
           <a:p>
             <a:fld id="{241EB5C9-1307-BA42-ABA2-0BC069CD8E7F}" type="datetimeFigureOut">
               <a:rPr lang="en-US" smtClean="0"/>
-              <a:t>12/4/2024</a:t>
+              <a:t>11/18/2025</a:t>
             </a:fld>
             <a:endParaRPr lang="en-US"/>
           </a:p>
@@ -1932,7 +1932,7 @@
           <a:p>
             <a:fld id="{241EB5C9-1307-BA42-ABA2-0BC069CD8E7F}" type="datetimeFigureOut">
               <a:rPr lang="en-US" smtClean="0"/>
-              <a:t>12/4/2024</a:t>
+              <a:t>11/18/2025</a:t>
             </a:fld>
             <a:endParaRPr lang="en-US"/>
           </a:p>
@@ -2027,7 +2027,7 @@
           <a:p>
             <a:fld id="{241EB5C9-1307-BA42-ABA2-0BC069CD8E7F}" type="datetimeFigureOut">
               <a:rPr lang="en-US" smtClean="0"/>
-              <a:t>12/4/2024</a:t>
+              <a:t>11/18/2025</a:t>
             </a:fld>
             <a:endParaRPr lang="en-US"/>
           </a:p>
@@ -2302,7 +2302,7 @@
           <a:p>
             <a:fld id="{241EB5C9-1307-BA42-ABA2-0BC069CD8E7F}" type="datetimeFigureOut">
               <a:rPr lang="en-US" smtClean="0"/>
-              <a:t>12/4/2024</a:t>
+              <a:t>11/18/2025</a:t>
             </a:fld>
             <a:endParaRPr lang="en-US"/>
           </a:p>
@@ -2554,7 +2554,7 @@
           <a:p>
             <a:fld id="{241EB5C9-1307-BA42-ABA2-0BC069CD8E7F}" type="datetimeFigureOut">
               <a:rPr lang="en-US" smtClean="0"/>
-              <a:t>12/4/2024</a:t>
+              <a:t>11/18/2025</a:t>
             </a:fld>
             <a:endParaRPr lang="en-US"/>
           </a:p>
@@ -2765,7 +2765,7 @@
           <a:p>
             <a:fld id="{241EB5C9-1307-BA42-ABA2-0BC069CD8E7F}" type="datetimeFigureOut">
               <a:rPr lang="en-US" smtClean="0"/>
-              <a:t>12/4/2024</a:t>
+              <a:t>11/18/2025</a:t>
             </a:fld>
             <a:endParaRPr lang="en-US"/>
           </a:p>
@@ -3196,9 +3196,17 @@
             <a:pPr marL="0" lvl="0" indent="0">
               <a:buNone/>
             </a:pPr>
+            <a:r>
+              <a:rPr dirty="0"/>
+              <a:t/>
+            </a:r>
             <a:br>
               <a:rPr dirty="0"/>
             </a:br>
+            <a:r>
+              <a:rPr dirty="0"/>
+              <a:t/>
+            </a:r>
             <a:br>
               <a:rPr dirty="0"/>
             </a:br>
@@ -3238,7 +3246,7 @@
           <p:cNvPr id="5" name="Picture 2" descr="Image result for harvard extension school logo">
             <a:extLst>
               <a:ext uri="{FF2B5EF4-FFF2-40B4-BE49-F238E27FC236}">
-                <a16:creationId xmlns:a16="http://schemas.microsoft.com/office/drawing/2014/main" id="{4589CD93-89FF-3DF6-420D-DE6D671B6DD7}"/>
+                <a16:creationId xmlns:a16="http://schemas.microsoft.com/office/drawing/2014/main" xmlns="" id="{4589CD93-89FF-3DF6-420D-DE6D671B6DD7}"/>
               </a:ext>
             </a:extLst>
           </p:cNvPr>
@@ -3285,7 +3293,7 @@
           <p:cNvPr id="6" name="TextBox 5">
             <a:extLst>
               <a:ext uri="{FF2B5EF4-FFF2-40B4-BE49-F238E27FC236}">
-                <a16:creationId xmlns:a16="http://schemas.microsoft.com/office/drawing/2014/main" id="{E74191BF-5D24-EFDF-F46A-91EA7CBF856B}"/>
+                <a16:creationId xmlns:a16="http://schemas.microsoft.com/office/drawing/2014/main" xmlns="" id="{E74191BF-5D24-EFDF-F46A-91EA7CBF856B}"/>
               </a:ext>
             </a:extLst>
           </p:cNvPr>
@@ -3522,7 +3530,7 @@
           <p:cNvPr id="5" name="Picture 4">
             <a:extLst>
               <a:ext uri="{FF2B5EF4-FFF2-40B4-BE49-F238E27FC236}">
-                <a16:creationId xmlns:a16="http://schemas.microsoft.com/office/drawing/2014/main" id="{C770BF19-DA06-54DF-EEDE-DC81ABBCF279}"/>
+                <a16:creationId xmlns:a16="http://schemas.microsoft.com/office/drawing/2014/main" xmlns="" id="{C770BF19-DA06-54DF-EEDE-DC81ABBCF279}"/>
               </a:ext>
             </a:extLst>
           </p:cNvPr>
@@ -3552,7 +3560,7 @@
           <p:cNvPr id="6" name="TextBox 5">
             <a:extLst>
               <a:ext uri="{FF2B5EF4-FFF2-40B4-BE49-F238E27FC236}">
-                <a16:creationId xmlns:a16="http://schemas.microsoft.com/office/drawing/2014/main" id="{8FFBB7B6-9D1E-EC0A-4743-338C2FEE8384}"/>
+                <a16:creationId xmlns:a16="http://schemas.microsoft.com/office/drawing/2014/main" xmlns="" id="{8FFBB7B6-9D1E-EC0A-4743-338C2FEE8384}"/>
               </a:ext>
             </a:extLst>
           </p:cNvPr>
@@ -3827,7 +3835,7 @@
           <p:cNvPr id="7" name="Picture 6">
             <a:extLst>
               <a:ext uri="{FF2B5EF4-FFF2-40B4-BE49-F238E27FC236}">
-                <a16:creationId xmlns:a16="http://schemas.microsoft.com/office/drawing/2014/main" id="{7123A30B-840D-5B3D-3F3A-0236E8EAE657}"/>
+                <a16:creationId xmlns:a16="http://schemas.microsoft.com/office/drawing/2014/main" xmlns="" id="{7123A30B-840D-5B3D-3F3A-0236E8EAE657}"/>
               </a:ext>
             </a:extLst>
           </p:cNvPr>
@@ -3857,7 +3865,7 @@
           <p:cNvPr id="8" name="Content Placeholder 2">
             <a:extLst>
               <a:ext uri="{FF2B5EF4-FFF2-40B4-BE49-F238E27FC236}">
-                <a16:creationId xmlns:a16="http://schemas.microsoft.com/office/drawing/2014/main" id="{9FB45A9A-C5B5-97A1-BA13-F8C0650AFE45}"/>
+                <a16:creationId xmlns:a16="http://schemas.microsoft.com/office/drawing/2014/main" xmlns="" id="{9FB45A9A-C5B5-97A1-BA13-F8C0650AFE45}"/>
               </a:ext>
             </a:extLst>
           </p:cNvPr>
@@ -4864,7 +4872,7 @@
         <p:cNvPr id="1" name="">
           <a:extLst>
             <a:ext uri="{FF2B5EF4-FFF2-40B4-BE49-F238E27FC236}">
-              <a16:creationId xmlns:a16="http://schemas.microsoft.com/office/drawing/2014/main" id="{CD71BD88-FDE9-2370-695E-FC0F7D1B6DAB}"/>
+              <a16:creationId xmlns:a16="http://schemas.microsoft.com/office/drawing/2014/main" xmlns="" id="{CD71BD88-FDE9-2370-695E-FC0F7D1B6DAB}"/>
             </a:ext>
           </a:extLst>
         </p:cNvPr>
@@ -4884,7 +4892,7 @@
           <p:cNvPr id="2" name="Title 1">
             <a:extLst>
               <a:ext uri="{FF2B5EF4-FFF2-40B4-BE49-F238E27FC236}">
-                <a16:creationId xmlns:a16="http://schemas.microsoft.com/office/drawing/2014/main" id="{53BD4683-14C9-83F7-D95C-7FA089F793FD}"/>
+                <a16:creationId xmlns:a16="http://schemas.microsoft.com/office/drawing/2014/main" xmlns="" id="{53BD4683-14C9-83F7-D95C-7FA089F793FD}"/>
               </a:ext>
             </a:extLst>
           </p:cNvPr>
@@ -4924,7 +4932,7 @@
               <p:cNvPr id="4" name="Text Placeholder 3">
                 <a:extLst>
                   <a:ext uri="{FF2B5EF4-FFF2-40B4-BE49-F238E27FC236}">
-                    <a16:creationId xmlns:a16="http://schemas.microsoft.com/office/drawing/2014/main" id="{E1A6D0E3-052E-98B3-C887-9D95F983CDAB}"/>
+                    <a16:creationId xmlns:a16="http://schemas.microsoft.com/office/drawing/2014/main" xmlns="" id="{E1A6D0E3-052E-98B3-C887-9D95F983CDAB}"/>
                   </a:ext>
                 </a:extLst>
               </p:cNvPr>
@@ -5391,7 +5399,7 @@
           <p:cNvPr id="3" name="Picture 1" descr="14_HierarchicalBayesModels_files/figure-pptx/echo-FALSE-1.png">
             <a:extLst>
               <a:ext uri="{FF2B5EF4-FFF2-40B4-BE49-F238E27FC236}">
-                <a16:creationId xmlns:a16="http://schemas.microsoft.com/office/drawing/2014/main" id="{39EB84D5-EB46-322C-72A8-2EF03BB8F894}"/>
+                <a16:creationId xmlns:a16="http://schemas.microsoft.com/office/drawing/2014/main" xmlns="" id="{39EB84D5-EB46-322C-72A8-2EF03BB8F894}"/>
               </a:ext>
             </a:extLst>
           </p:cNvPr>
@@ -6069,7 +6077,7 @@
           <p:cNvPr id="6" name="Picture 5">
             <a:extLst>
               <a:ext uri="{FF2B5EF4-FFF2-40B4-BE49-F238E27FC236}">
-                <a16:creationId xmlns:a16="http://schemas.microsoft.com/office/drawing/2014/main" id="{49F67905-6E13-7F6E-1143-B6C7A0A73F19}"/>
+                <a16:creationId xmlns:a16="http://schemas.microsoft.com/office/drawing/2014/main" xmlns="" id="{49F67905-6E13-7F6E-1143-B6C7A0A73F19}"/>
               </a:ext>
             </a:extLst>
           </p:cNvPr>
@@ -6231,6 +6239,10 @@
               </a:rPr>
               <a:t>:</a:t>
             </a:r>
+            <a:r>
+              <a:rPr sz="2600" dirty="0"/>
+              <a:t/>
+            </a:r>
             <a:br>
               <a:rPr sz="2600" dirty="0"/>
             </a:br>
@@ -6267,6 +6279,10 @@
               </a:rPr>
               <a:t> of floors   </a:t>
             </a:r>
+            <a:r>
+              <a:rPr sz="2600" dirty="0"/>
+              <a:t/>
+            </a:r>
             <a:br>
               <a:rPr sz="2600" dirty="0"/>
             </a:br>
@@ -6330,6 +6346,10 @@
               </a:rPr>
               <a:t>)   </a:t>
             </a:r>
+            <a:r>
+              <a:rPr sz="2600" dirty="0"/>
+              <a:t/>
+            </a:r>
             <a:br>
               <a:rPr sz="2600" dirty="0"/>
             </a:br>
@@ -6348,6 +6368,10 @@
               </a:rPr>
               <a:t># Priors for unknown model parameters</a:t>
             </a:r>
+            <a:r>
+              <a:rPr sz="2600" dirty="0"/>
+              <a:t/>
+            </a:r>
             <a:br>
               <a:rPr sz="2600" dirty="0"/>
             </a:br>
@@ -6471,6 +6495,10 @@
               </a:rPr>
               <a:t>)</a:t>
             </a:r>
+            <a:r>
+              <a:rPr sz="2600" dirty="0"/>
+              <a:t/>
+            </a:r>
             <a:br>
               <a:rPr sz="2600" dirty="0"/>
             </a:br>
@@ -6537,9 +6565,17 @@
               </a:rPr>
               <a:t>)</a:t>
             </a:r>
+            <a:r>
+              <a:rPr sz="2600" dirty="0"/>
+              <a:t/>
+            </a:r>
             <a:br>
               <a:rPr sz="2600" dirty="0"/>
             </a:br>
+            <a:r>
+              <a:rPr sz="2600" dirty="0"/>
+              <a:t/>
+            </a:r>
             <a:br>
               <a:rPr sz="2600" dirty="0"/>
             </a:br>
@@ -6567,6 +6603,10 @@
               </a:rPr>
               <a:t>response prediction</a:t>
             </a:r>
+            <a:r>
+              <a:rPr sz="2600" dirty="0"/>
+              <a:t/>
+            </a:r>
             <a:br>
               <a:rPr sz="2600" dirty="0"/>
             </a:br>
@@ -6671,6 +6711,10 @@
             <a:pPr lvl="0" indent="0">
               <a:buNone/>
             </a:pPr>
+            <a:r>
+              <a:rPr sz="2600" dirty="0"/>
+              <a:t/>
+            </a:r>
             <a:br>
               <a:rPr sz="2600" dirty="0"/>
             </a:br>
@@ -6688,6 +6732,10 @@
                 <a:latin typeface="Courier"/>
               </a:rPr>
               <a:t># Likelihood of observations</a:t>
+            </a:r>
+            <a:r>
+              <a:rPr sz="2600" dirty="0"/>
+              <a:t/>
             </a:r>
             <a:br>
               <a:rPr sz="2600" dirty="0"/>
@@ -6903,7 +6951,7 @@
           <p:cNvPr id="5" name="Picture 4">
             <a:extLst>
               <a:ext uri="{FF2B5EF4-FFF2-40B4-BE49-F238E27FC236}">
-                <a16:creationId xmlns:a16="http://schemas.microsoft.com/office/drawing/2014/main" id="{78B45827-459A-86A8-B0EE-47A19E9C4656}"/>
+                <a16:creationId xmlns:a16="http://schemas.microsoft.com/office/drawing/2014/main" xmlns="" id="{78B45827-459A-86A8-B0EE-47A19E9C4656}"/>
               </a:ext>
             </a:extLst>
           </p:cNvPr>
@@ -6933,7 +6981,7 @@
           <p:cNvPr id="7" name="Picture 6">
             <a:extLst>
               <a:ext uri="{FF2B5EF4-FFF2-40B4-BE49-F238E27FC236}">
-                <a16:creationId xmlns:a16="http://schemas.microsoft.com/office/drawing/2014/main" id="{39E51761-F121-DDCB-555A-ED174E0AB72D}"/>
+                <a16:creationId xmlns:a16="http://schemas.microsoft.com/office/drawing/2014/main" xmlns="" id="{39E51761-F121-DDCB-555A-ED174E0AB72D}"/>
               </a:ext>
             </a:extLst>
           </p:cNvPr>
@@ -7019,7 +7067,7 @@
           <p:cNvPr id="4" name="Picture 3">
             <a:extLst>
               <a:ext uri="{FF2B5EF4-FFF2-40B4-BE49-F238E27FC236}">
-                <a16:creationId xmlns:a16="http://schemas.microsoft.com/office/drawing/2014/main" id="{C73F8FB9-0F46-EF35-296E-E0A51E7F58C0}"/>
+                <a16:creationId xmlns:a16="http://schemas.microsoft.com/office/drawing/2014/main" xmlns="" id="{C73F8FB9-0F46-EF35-296E-E0A51E7F58C0}"/>
               </a:ext>
             </a:extLst>
           </p:cNvPr>
@@ -7049,7 +7097,7 @@
           <p:cNvPr id="5" name="Content Placeholder 2">
             <a:extLst>
               <a:ext uri="{FF2B5EF4-FFF2-40B4-BE49-F238E27FC236}">
-                <a16:creationId xmlns:a16="http://schemas.microsoft.com/office/drawing/2014/main" id="{E7958055-EE8D-79CD-9765-B5A9104C5E08}"/>
+                <a16:creationId xmlns:a16="http://schemas.microsoft.com/office/drawing/2014/main" xmlns="" id="{E7958055-EE8D-79CD-9765-B5A9104C5E08}"/>
               </a:ext>
             </a:extLst>
           </p:cNvPr>
@@ -7237,7 +7285,7 @@
         <p:cNvPr id="1" name="">
           <a:extLst>
             <a:ext uri="{FF2B5EF4-FFF2-40B4-BE49-F238E27FC236}">
-              <a16:creationId xmlns:a16="http://schemas.microsoft.com/office/drawing/2014/main" id="{738F1E95-A7FF-E407-917D-230080BDD034}"/>
+              <a16:creationId xmlns:a16="http://schemas.microsoft.com/office/drawing/2014/main" xmlns="" id="{738F1E95-A7FF-E407-917D-230080BDD034}"/>
             </a:ext>
           </a:extLst>
         </p:cNvPr>
@@ -7257,7 +7305,7 @@
           <p:cNvPr id="2" name="Title 1">
             <a:extLst>
               <a:ext uri="{FF2B5EF4-FFF2-40B4-BE49-F238E27FC236}">
-                <a16:creationId xmlns:a16="http://schemas.microsoft.com/office/drawing/2014/main" id="{8560ABFE-58DC-2D84-02C7-0A7D0F3B0579}"/>
+                <a16:creationId xmlns:a16="http://schemas.microsoft.com/office/drawing/2014/main" xmlns="" id="{8560ABFE-58DC-2D84-02C7-0A7D0F3B0579}"/>
               </a:ext>
             </a:extLst>
           </p:cNvPr>
@@ -7312,7 +7360,7 @@
           <p:cNvPr id="4" name="Picture 3">
             <a:extLst>
               <a:ext uri="{FF2B5EF4-FFF2-40B4-BE49-F238E27FC236}">
-                <a16:creationId xmlns:a16="http://schemas.microsoft.com/office/drawing/2014/main" id="{F0D9B643-9F04-A60B-D0FC-488F350174B4}"/>
+                <a16:creationId xmlns:a16="http://schemas.microsoft.com/office/drawing/2014/main" xmlns="" id="{F0D9B643-9F04-A60B-D0FC-488F350174B4}"/>
               </a:ext>
             </a:extLst>
           </p:cNvPr>
@@ -7344,7 +7392,7 @@
               <p:cNvPr id="5" name="Content Placeholder 2">
                 <a:extLst>
                   <a:ext uri="{FF2B5EF4-FFF2-40B4-BE49-F238E27FC236}">
-                    <a16:creationId xmlns:a16="http://schemas.microsoft.com/office/drawing/2014/main" id="{9BA7CF00-C306-7FA9-0811-D83B973640AE}"/>
+                    <a16:creationId xmlns:a16="http://schemas.microsoft.com/office/drawing/2014/main" xmlns="" id="{9BA7CF00-C306-7FA9-0811-D83B973640AE}"/>
                   </a:ext>
                 </a:extLst>
               </p:cNvPr>
@@ -7545,7 +7593,7 @@
         <p:cNvPr id="1" name="">
           <a:extLst>
             <a:ext uri="{FF2B5EF4-FFF2-40B4-BE49-F238E27FC236}">
-              <a16:creationId xmlns:a16="http://schemas.microsoft.com/office/drawing/2014/main" id="{8AC33867-7487-5410-F5F0-45764DF53A77}"/>
+              <a16:creationId xmlns:a16="http://schemas.microsoft.com/office/drawing/2014/main" xmlns="" id="{8AC33867-7487-5410-F5F0-45764DF53A77}"/>
             </a:ext>
           </a:extLst>
         </p:cNvPr>
@@ -7565,7 +7613,7 @@
           <p:cNvPr id="2" name="Title 1">
             <a:extLst>
               <a:ext uri="{FF2B5EF4-FFF2-40B4-BE49-F238E27FC236}">
-                <a16:creationId xmlns:a16="http://schemas.microsoft.com/office/drawing/2014/main" id="{6262BCB6-61D6-EFE7-65F0-9292366E0A4E}"/>
+                <a16:creationId xmlns:a16="http://schemas.microsoft.com/office/drawing/2014/main" xmlns="" id="{6262BCB6-61D6-EFE7-65F0-9292366E0A4E}"/>
               </a:ext>
             </a:extLst>
           </p:cNvPr>
@@ -7604,7 +7652,7 @@
           <p:cNvPr id="3" name="Content Placeholder 2">
             <a:extLst>
               <a:ext uri="{FF2B5EF4-FFF2-40B4-BE49-F238E27FC236}">
-                <a16:creationId xmlns:a16="http://schemas.microsoft.com/office/drawing/2014/main" id="{D4035494-38AC-CEAE-091F-CA5A17905F22}"/>
+                <a16:creationId xmlns:a16="http://schemas.microsoft.com/office/drawing/2014/main" xmlns="" id="{D4035494-38AC-CEAE-091F-CA5A17905F22}"/>
               </a:ext>
             </a:extLst>
           </p:cNvPr>
@@ -7762,7 +7810,7 @@
         <p:cNvPr id="1" name="">
           <a:extLst>
             <a:ext uri="{FF2B5EF4-FFF2-40B4-BE49-F238E27FC236}">
-              <a16:creationId xmlns:a16="http://schemas.microsoft.com/office/drawing/2014/main" id="{7254184E-B22C-E8E0-3A16-01C7A845E619}"/>
+              <a16:creationId xmlns:a16="http://schemas.microsoft.com/office/drawing/2014/main" xmlns="" id="{7254184E-B22C-E8E0-3A16-01C7A845E619}"/>
             </a:ext>
           </a:extLst>
         </p:cNvPr>
@@ -7782,7 +7830,7 @@
           <p:cNvPr id="2" name="Title 1">
             <a:extLst>
               <a:ext uri="{FF2B5EF4-FFF2-40B4-BE49-F238E27FC236}">
-                <a16:creationId xmlns:a16="http://schemas.microsoft.com/office/drawing/2014/main" id="{28FEF3E0-AA0E-8CFC-6EA4-E8D39A958A8F}"/>
+                <a16:creationId xmlns:a16="http://schemas.microsoft.com/office/drawing/2014/main" xmlns="" id="{28FEF3E0-AA0E-8CFC-6EA4-E8D39A958A8F}"/>
               </a:ext>
             </a:extLst>
           </p:cNvPr>
@@ -7823,7 +7871,7 @@
               <p:cNvPr id="3" name="Content Placeholder 2">
                 <a:extLst>
                   <a:ext uri="{FF2B5EF4-FFF2-40B4-BE49-F238E27FC236}">
-                    <a16:creationId xmlns:a16="http://schemas.microsoft.com/office/drawing/2014/main" id="{B170DC6C-EB64-0738-AB85-446DAD53AA28}"/>
+                    <a16:creationId xmlns:a16="http://schemas.microsoft.com/office/drawing/2014/main" xmlns="" id="{B170DC6C-EB64-0738-AB85-446DAD53AA28}"/>
                   </a:ext>
                 </a:extLst>
               </p:cNvPr>
@@ -8629,7 +8677,7 @@
         <p:cNvPr id="1" name="">
           <a:extLst>
             <a:ext uri="{FF2B5EF4-FFF2-40B4-BE49-F238E27FC236}">
-              <a16:creationId xmlns:a16="http://schemas.microsoft.com/office/drawing/2014/main" id="{7F3231B0-D331-B092-12C9-F27A1226923D}"/>
+              <a16:creationId xmlns:a16="http://schemas.microsoft.com/office/drawing/2014/main" xmlns="" id="{7F3231B0-D331-B092-12C9-F27A1226923D}"/>
             </a:ext>
           </a:extLst>
         </p:cNvPr>
@@ -8649,7 +8697,7 @@
           <p:cNvPr id="2" name="Title 1">
             <a:extLst>
               <a:ext uri="{FF2B5EF4-FFF2-40B4-BE49-F238E27FC236}">
-                <a16:creationId xmlns:a16="http://schemas.microsoft.com/office/drawing/2014/main" id="{2FF87365-D063-A726-3DB5-0ADC17D17C71}"/>
+                <a16:creationId xmlns:a16="http://schemas.microsoft.com/office/drawing/2014/main" xmlns="" id="{2FF87365-D063-A726-3DB5-0ADC17D17C71}"/>
               </a:ext>
             </a:extLst>
           </p:cNvPr>
@@ -8697,7 +8745,7 @@
               <p:cNvPr id="4" name="Text Placeholder 3">
                 <a:extLst>
                   <a:ext uri="{FF2B5EF4-FFF2-40B4-BE49-F238E27FC236}">
-                    <a16:creationId xmlns:a16="http://schemas.microsoft.com/office/drawing/2014/main" id="{9E54D9ED-3A8C-7C6C-A59B-DD2782384663}"/>
+                    <a16:creationId xmlns:a16="http://schemas.microsoft.com/office/drawing/2014/main" xmlns="" id="{9E54D9ED-3A8C-7C6C-A59B-DD2782384663}"/>
                   </a:ext>
                 </a:extLst>
               </p:cNvPr>
@@ -9439,7 +9487,7 @@
           <p:cNvPr id="5" name="Picture 4">
             <a:extLst>
               <a:ext uri="{FF2B5EF4-FFF2-40B4-BE49-F238E27FC236}">
-                <a16:creationId xmlns:a16="http://schemas.microsoft.com/office/drawing/2014/main" id="{85C45F30-21CC-BB44-04C0-1072DC78F72E}"/>
+                <a16:creationId xmlns:a16="http://schemas.microsoft.com/office/drawing/2014/main" xmlns="" id="{85C45F30-21CC-BB44-04C0-1072DC78F72E}"/>
               </a:ext>
             </a:extLst>
           </p:cNvPr>
@@ -9485,7 +9533,7 @@
         <p:cNvPr id="1" name="">
           <a:extLst>
             <a:ext uri="{FF2B5EF4-FFF2-40B4-BE49-F238E27FC236}">
-              <a16:creationId xmlns:a16="http://schemas.microsoft.com/office/drawing/2014/main" id="{2E2EFF6D-046F-7FD8-5F62-E2EA63865FDB}"/>
+              <a16:creationId xmlns:a16="http://schemas.microsoft.com/office/drawing/2014/main" xmlns="" id="{2E2EFF6D-046F-7FD8-5F62-E2EA63865FDB}"/>
             </a:ext>
           </a:extLst>
         </p:cNvPr>
@@ -9505,7 +9553,7 @@
           <p:cNvPr id="2" name="Title 1">
             <a:extLst>
               <a:ext uri="{FF2B5EF4-FFF2-40B4-BE49-F238E27FC236}">
-                <a16:creationId xmlns:a16="http://schemas.microsoft.com/office/drawing/2014/main" id="{A880A3EF-D963-4C38-DBBE-C5F23AA8D704}"/>
+                <a16:creationId xmlns:a16="http://schemas.microsoft.com/office/drawing/2014/main" xmlns="" id="{A880A3EF-D963-4C38-DBBE-C5F23AA8D704}"/>
               </a:ext>
             </a:extLst>
           </p:cNvPr>
@@ -9553,7 +9601,7 @@
               <p:cNvPr id="4" name="Text Placeholder 3">
                 <a:extLst>
                   <a:ext uri="{FF2B5EF4-FFF2-40B4-BE49-F238E27FC236}">
-                    <a16:creationId xmlns:a16="http://schemas.microsoft.com/office/drawing/2014/main" id="{E260611B-8455-7E66-D7A2-4F42956D8BDA}"/>
+                    <a16:creationId xmlns:a16="http://schemas.microsoft.com/office/drawing/2014/main" xmlns="" id="{E260611B-8455-7E66-D7A2-4F42956D8BDA}"/>
                   </a:ext>
                 </a:extLst>
               </p:cNvPr>
@@ -9689,7 +9737,7 @@
           <p:cNvPr id="3" name="Rectangle: Rounded Corners 2">
             <a:extLst>
               <a:ext uri="{FF2B5EF4-FFF2-40B4-BE49-F238E27FC236}">
-                <a16:creationId xmlns:a16="http://schemas.microsoft.com/office/drawing/2014/main" id="{0041CF86-6873-F7AF-6717-FE9033023CE2}"/>
+                <a16:creationId xmlns:a16="http://schemas.microsoft.com/office/drawing/2014/main" xmlns="" id="{0041CF86-6873-F7AF-6717-FE9033023CE2}"/>
               </a:ext>
             </a:extLst>
           </p:cNvPr>
@@ -9741,7 +9789,7 @@
               <p:cNvPr id="6" name="TextBox 5">
                 <a:extLst>
                   <a:ext uri="{FF2B5EF4-FFF2-40B4-BE49-F238E27FC236}">
-                    <a16:creationId xmlns:a16="http://schemas.microsoft.com/office/drawing/2014/main" id="{CBA0C8E8-A9EA-50F3-E23C-B82A966959A8}"/>
+                    <a16:creationId xmlns:a16="http://schemas.microsoft.com/office/drawing/2014/main" xmlns="" id="{CBA0C8E8-A9EA-50F3-E23C-B82A966959A8}"/>
                   </a:ext>
                 </a:extLst>
               </p:cNvPr>
@@ -9835,7 +9883,7 @@
           <p:cNvPr id="7" name="Picture 6">
             <a:extLst>
               <a:ext uri="{FF2B5EF4-FFF2-40B4-BE49-F238E27FC236}">
-                <a16:creationId xmlns:a16="http://schemas.microsoft.com/office/drawing/2014/main" id="{E388F7C7-75BC-B564-C5F5-05738D82C47A}"/>
+                <a16:creationId xmlns:a16="http://schemas.microsoft.com/office/drawing/2014/main" xmlns="" id="{E388F7C7-75BC-B564-C5F5-05738D82C47A}"/>
               </a:ext>
             </a:extLst>
           </p:cNvPr>
@@ -9881,7 +9929,7 @@
         <p:cNvPr id="1" name="">
           <a:extLst>
             <a:ext uri="{FF2B5EF4-FFF2-40B4-BE49-F238E27FC236}">
-              <a16:creationId xmlns:a16="http://schemas.microsoft.com/office/drawing/2014/main" id="{7D2FBBD9-767F-BD9D-7E0D-FBCA30E7C70F}"/>
+              <a16:creationId xmlns:a16="http://schemas.microsoft.com/office/drawing/2014/main" xmlns="" id="{7D2FBBD9-767F-BD9D-7E0D-FBCA30E7C70F}"/>
             </a:ext>
           </a:extLst>
         </p:cNvPr>
@@ -9901,7 +9949,7 @@
           <p:cNvPr id="2" name="Title 1">
             <a:extLst>
               <a:ext uri="{FF2B5EF4-FFF2-40B4-BE49-F238E27FC236}">
-                <a16:creationId xmlns:a16="http://schemas.microsoft.com/office/drawing/2014/main" id="{806FC60E-C63A-9EDC-B069-60C911B61129}"/>
+                <a16:creationId xmlns:a16="http://schemas.microsoft.com/office/drawing/2014/main" xmlns="" id="{806FC60E-C63A-9EDC-B069-60C911B61129}"/>
               </a:ext>
             </a:extLst>
           </p:cNvPr>
@@ -9951,7 +9999,7 @@
           <p:cNvPr id="3" name="Content Placeholder 2">
             <a:extLst>
               <a:ext uri="{FF2B5EF4-FFF2-40B4-BE49-F238E27FC236}">
-                <a16:creationId xmlns:a16="http://schemas.microsoft.com/office/drawing/2014/main" id="{DD1671B8-F8FD-25B1-C782-70AB92D27E42}"/>
+                <a16:creationId xmlns:a16="http://schemas.microsoft.com/office/drawing/2014/main" xmlns="" id="{DD1671B8-F8FD-25B1-C782-70AB92D27E42}"/>
               </a:ext>
             </a:extLst>
           </p:cNvPr>
@@ -10511,7 +10559,7 @@
         <p:cNvPr id="1" name="">
           <a:extLst>
             <a:ext uri="{FF2B5EF4-FFF2-40B4-BE49-F238E27FC236}">
-              <a16:creationId xmlns:a16="http://schemas.microsoft.com/office/drawing/2014/main" id="{C38EB784-8CA8-513D-B361-A68E7A5C7A0C}"/>
+              <a16:creationId xmlns:a16="http://schemas.microsoft.com/office/drawing/2014/main" xmlns="" id="{C38EB784-8CA8-513D-B361-A68E7A5C7A0C}"/>
             </a:ext>
           </a:extLst>
         </p:cNvPr>
@@ -10531,7 +10579,7 @@
           <p:cNvPr id="2" name="Title 1">
             <a:extLst>
               <a:ext uri="{FF2B5EF4-FFF2-40B4-BE49-F238E27FC236}">
-                <a16:creationId xmlns:a16="http://schemas.microsoft.com/office/drawing/2014/main" id="{07AFC9E4-3C54-0453-0842-EF399924F176}"/>
+                <a16:creationId xmlns:a16="http://schemas.microsoft.com/office/drawing/2014/main" xmlns="" id="{07AFC9E4-3C54-0453-0842-EF399924F176}"/>
               </a:ext>
             </a:extLst>
           </p:cNvPr>
@@ -10574,7 +10622,7 @@
           <p:cNvPr id="3" name="Content Placeholder 2">
             <a:extLst>
               <a:ext uri="{FF2B5EF4-FFF2-40B4-BE49-F238E27FC236}">
-                <a16:creationId xmlns:a16="http://schemas.microsoft.com/office/drawing/2014/main" id="{8D435693-6340-A79A-C263-EB7B350A39BE}"/>
+                <a16:creationId xmlns:a16="http://schemas.microsoft.com/office/drawing/2014/main" xmlns="" id="{8D435693-6340-A79A-C263-EB7B350A39BE}"/>
               </a:ext>
             </a:extLst>
           </p:cNvPr>
@@ -10638,7 +10686,7 @@
               <p:cNvPr id="6" name="Text Placeholder 3">
                 <a:extLst>
                   <a:ext uri="{FF2B5EF4-FFF2-40B4-BE49-F238E27FC236}">
-                    <a16:creationId xmlns:a16="http://schemas.microsoft.com/office/drawing/2014/main" id="{75C1A475-4B32-0C7A-B9DD-4D474E495F4C}"/>
+                    <a16:creationId xmlns:a16="http://schemas.microsoft.com/office/drawing/2014/main" xmlns="" id="{75C1A475-4B32-0C7A-B9DD-4D474E495F4C}"/>
                   </a:ext>
                 </a:extLst>
               </p:cNvPr>
@@ -11003,7 +11051,7 @@
           <p:cNvPr id="7" name="Picture 6">
             <a:extLst>
               <a:ext uri="{FF2B5EF4-FFF2-40B4-BE49-F238E27FC236}">
-                <a16:creationId xmlns:a16="http://schemas.microsoft.com/office/drawing/2014/main" id="{4D0C2478-99FA-8B2A-5030-90F2ED5F0484}"/>
+                <a16:creationId xmlns:a16="http://schemas.microsoft.com/office/drawing/2014/main" xmlns="" id="{4D0C2478-99FA-8B2A-5030-90F2ED5F0484}"/>
               </a:ext>
             </a:extLst>
           </p:cNvPr>
@@ -11049,7 +11097,7 @@
         <p:cNvPr id="1" name="">
           <a:extLst>
             <a:ext uri="{FF2B5EF4-FFF2-40B4-BE49-F238E27FC236}">
-              <a16:creationId xmlns:a16="http://schemas.microsoft.com/office/drawing/2014/main" id="{7966484E-2B0B-C9F8-AAD9-A2B56C752D30}"/>
+              <a16:creationId xmlns:a16="http://schemas.microsoft.com/office/drawing/2014/main" xmlns="" id="{7966484E-2B0B-C9F8-AAD9-A2B56C752D30}"/>
             </a:ext>
           </a:extLst>
         </p:cNvPr>
@@ -11069,7 +11117,7 @@
           <p:cNvPr id="2" name="Title 1">
             <a:extLst>
               <a:ext uri="{FF2B5EF4-FFF2-40B4-BE49-F238E27FC236}">
-                <a16:creationId xmlns:a16="http://schemas.microsoft.com/office/drawing/2014/main" id="{7DC90CB9-DBA1-DBE7-F679-F4E240833047}"/>
+                <a16:creationId xmlns:a16="http://schemas.microsoft.com/office/drawing/2014/main" xmlns="" id="{7DC90CB9-DBA1-DBE7-F679-F4E240833047}"/>
               </a:ext>
             </a:extLst>
           </p:cNvPr>
@@ -11112,7 +11160,7 @@
           <p:cNvPr id="3" name="Content Placeholder 2">
             <a:extLst>
               <a:ext uri="{FF2B5EF4-FFF2-40B4-BE49-F238E27FC236}">
-                <a16:creationId xmlns:a16="http://schemas.microsoft.com/office/drawing/2014/main" id="{41D8E0BC-564F-6438-332A-254C46595924}"/>
+                <a16:creationId xmlns:a16="http://schemas.microsoft.com/office/drawing/2014/main" xmlns="" id="{41D8E0BC-564F-6438-332A-254C46595924}"/>
               </a:ext>
             </a:extLst>
           </p:cNvPr>
@@ -11166,7 +11214,7 @@
           <p:cNvPr id="6" name="Picture 5">
             <a:extLst>
               <a:ext uri="{FF2B5EF4-FFF2-40B4-BE49-F238E27FC236}">
-                <a16:creationId xmlns:a16="http://schemas.microsoft.com/office/drawing/2014/main" id="{90D5E81B-7F65-E085-C8BF-3515C76D8A6F}"/>
+                <a16:creationId xmlns:a16="http://schemas.microsoft.com/office/drawing/2014/main" xmlns="" id="{90D5E81B-7F65-E085-C8BF-3515C76D8A6F}"/>
               </a:ext>
             </a:extLst>
           </p:cNvPr>
@@ -11212,7 +11260,7 @@
         <p:cNvPr id="1" name="">
           <a:extLst>
             <a:ext uri="{FF2B5EF4-FFF2-40B4-BE49-F238E27FC236}">
-              <a16:creationId xmlns:a16="http://schemas.microsoft.com/office/drawing/2014/main" id="{27C56D8B-B245-FC1D-7A67-7502FE53D782}"/>
+              <a16:creationId xmlns:a16="http://schemas.microsoft.com/office/drawing/2014/main" xmlns="" id="{27C56D8B-B245-FC1D-7A67-7502FE53D782}"/>
             </a:ext>
           </a:extLst>
         </p:cNvPr>
@@ -11232,7 +11280,7 @@
           <p:cNvPr id="2" name="Title 1">
             <a:extLst>
               <a:ext uri="{FF2B5EF4-FFF2-40B4-BE49-F238E27FC236}">
-                <a16:creationId xmlns:a16="http://schemas.microsoft.com/office/drawing/2014/main" id="{A5CAF1E2-AA7D-8F79-94A9-24676A38A9F7}"/>
+                <a16:creationId xmlns:a16="http://schemas.microsoft.com/office/drawing/2014/main" xmlns="" id="{A5CAF1E2-AA7D-8F79-94A9-24676A38A9F7}"/>
               </a:ext>
             </a:extLst>
           </p:cNvPr>
@@ -11281,7 +11329,7 @@
           <p:cNvPr id="3" name="Content Placeholder 2">
             <a:extLst>
               <a:ext uri="{FF2B5EF4-FFF2-40B4-BE49-F238E27FC236}">
-                <a16:creationId xmlns:a16="http://schemas.microsoft.com/office/drawing/2014/main" id="{2B72EFDE-33F6-A6C7-436E-2065C0A64522}"/>
+                <a16:creationId xmlns:a16="http://schemas.microsoft.com/office/drawing/2014/main" xmlns="" id="{2B72EFDE-33F6-A6C7-436E-2065C0A64522}"/>
               </a:ext>
             </a:extLst>
           </p:cNvPr>
@@ -11328,7 +11376,7 @@
           <p:cNvPr id="4" name="Text Placeholder 3">
             <a:extLst>
               <a:ext uri="{FF2B5EF4-FFF2-40B4-BE49-F238E27FC236}">
-                <a16:creationId xmlns:a16="http://schemas.microsoft.com/office/drawing/2014/main" id="{671C0910-09D1-EF37-84D5-B68A51152C8F}"/>
+                <a16:creationId xmlns:a16="http://schemas.microsoft.com/office/drawing/2014/main" xmlns="" id="{671C0910-09D1-EF37-84D5-B68A51152C8F}"/>
               </a:ext>
             </a:extLst>
           </p:cNvPr>
@@ -11524,7 +11572,7 @@
           <p:cNvPr id="7" name="Picture 6">
             <a:extLst>
               <a:ext uri="{FF2B5EF4-FFF2-40B4-BE49-F238E27FC236}">
-                <a16:creationId xmlns:a16="http://schemas.microsoft.com/office/drawing/2014/main" id="{63801E8E-0EB7-3F9D-B4F8-EC7596F35ACD}"/>
+                <a16:creationId xmlns:a16="http://schemas.microsoft.com/office/drawing/2014/main" xmlns="" id="{63801E8E-0EB7-3F9D-B4F8-EC7596F35ACD}"/>
               </a:ext>
             </a:extLst>
           </p:cNvPr>
@@ -11570,7 +11618,7 @@
         <p:cNvPr id="1" name="">
           <a:extLst>
             <a:ext uri="{FF2B5EF4-FFF2-40B4-BE49-F238E27FC236}">
-              <a16:creationId xmlns:a16="http://schemas.microsoft.com/office/drawing/2014/main" id="{6C683F67-61ED-D717-809C-0788BB84E1BE}"/>
+              <a16:creationId xmlns:a16="http://schemas.microsoft.com/office/drawing/2014/main" xmlns="" id="{6C683F67-61ED-D717-809C-0788BB84E1BE}"/>
             </a:ext>
           </a:extLst>
         </p:cNvPr>
@@ -11590,7 +11638,7 @@
           <p:cNvPr id="2" name="Title 1">
             <a:extLst>
               <a:ext uri="{FF2B5EF4-FFF2-40B4-BE49-F238E27FC236}">
-                <a16:creationId xmlns:a16="http://schemas.microsoft.com/office/drawing/2014/main" id="{24232C18-86C8-045C-7C2F-D3C7198AA5CB}"/>
+                <a16:creationId xmlns:a16="http://schemas.microsoft.com/office/drawing/2014/main" xmlns="" id="{24232C18-86C8-045C-7C2F-D3C7198AA5CB}"/>
               </a:ext>
             </a:extLst>
           </p:cNvPr>
@@ -11625,7 +11673,7 @@
           <p:cNvPr id="3" name="Content Placeholder 2">
             <a:extLst>
               <a:ext uri="{FF2B5EF4-FFF2-40B4-BE49-F238E27FC236}">
-                <a16:creationId xmlns:a16="http://schemas.microsoft.com/office/drawing/2014/main" id="{C6469316-7ADF-2752-D6E6-71015F71DA5A}"/>
+                <a16:creationId xmlns:a16="http://schemas.microsoft.com/office/drawing/2014/main" xmlns="" id="{C6469316-7ADF-2752-D6E6-71015F71DA5A}"/>
               </a:ext>
             </a:extLst>
           </p:cNvPr>
@@ -11927,7 +11975,7 @@
         <p:cNvPr id="1" name="">
           <a:extLst>
             <a:ext uri="{FF2B5EF4-FFF2-40B4-BE49-F238E27FC236}">
-              <a16:creationId xmlns:a16="http://schemas.microsoft.com/office/drawing/2014/main" id="{2B8A45A2-1EDA-EEAC-59E9-E89663FF0A0A}"/>
+              <a16:creationId xmlns:a16="http://schemas.microsoft.com/office/drawing/2014/main" xmlns="" id="{2B8A45A2-1EDA-EEAC-59E9-E89663FF0A0A}"/>
             </a:ext>
           </a:extLst>
         </p:cNvPr>
@@ -11947,7 +11995,7 @@
           <p:cNvPr id="2" name="Title 1">
             <a:extLst>
               <a:ext uri="{FF2B5EF4-FFF2-40B4-BE49-F238E27FC236}">
-                <a16:creationId xmlns:a16="http://schemas.microsoft.com/office/drawing/2014/main" id="{B5B34B72-2394-EDAA-2E09-9ECF098500C4}"/>
+                <a16:creationId xmlns:a16="http://schemas.microsoft.com/office/drawing/2014/main" xmlns="" id="{B5B34B72-2394-EDAA-2E09-9ECF098500C4}"/>
               </a:ext>
             </a:extLst>
           </p:cNvPr>
@@ -11991,7 +12039,7 @@
               <p:cNvPr id="4" name="Text Placeholder 3">
                 <a:extLst>
                   <a:ext uri="{FF2B5EF4-FFF2-40B4-BE49-F238E27FC236}">
-                    <a16:creationId xmlns:a16="http://schemas.microsoft.com/office/drawing/2014/main" id="{899CFB7F-B1C9-CB3C-20C3-345302771D91}"/>
+                    <a16:creationId xmlns:a16="http://schemas.microsoft.com/office/drawing/2014/main" xmlns="" id="{899CFB7F-B1C9-CB3C-20C3-345302771D91}"/>
                   </a:ext>
                 </a:extLst>
               </p:cNvPr>
@@ -12776,7 +12824,7 @@
           <p:cNvPr id="6" name="Picture 5">
             <a:extLst>
               <a:ext uri="{FF2B5EF4-FFF2-40B4-BE49-F238E27FC236}">
-                <a16:creationId xmlns:a16="http://schemas.microsoft.com/office/drawing/2014/main" id="{23C8E2EF-E734-5BCD-E76B-96C9E1F403FD}"/>
+                <a16:creationId xmlns:a16="http://schemas.microsoft.com/office/drawing/2014/main" xmlns="" id="{23C8E2EF-E734-5BCD-E76B-96C9E1F403FD}"/>
               </a:ext>
             </a:extLst>
           </p:cNvPr>
@@ -12822,7 +12870,7 @@
         <p:cNvPr id="1" name="">
           <a:extLst>
             <a:ext uri="{FF2B5EF4-FFF2-40B4-BE49-F238E27FC236}">
-              <a16:creationId xmlns:a16="http://schemas.microsoft.com/office/drawing/2014/main" id="{695976BB-1C60-9530-C4D8-1A7B9289498E}"/>
+              <a16:creationId xmlns:a16="http://schemas.microsoft.com/office/drawing/2014/main" xmlns="" id="{695976BB-1C60-9530-C4D8-1A7B9289498E}"/>
             </a:ext>
           </a:extLst>
         </p:cNvPr>
@@ -12842,7 +12890,7 @@
           <p:cNvPr id="2" name="Title 1">
             <a:extLst>
               <a:ext uri="{FF2B5EF4-FFF2-40B4-BE49-F238E27FC236}">
-                <a16:creationId xmlns:a16="http://schemas.microsoft.com/office/drawing/2014/main" id="{CAAEBE6E-3A68-80B3-D35B-3C75FCB33475}"/>
+                <a16:creationId xmlns:a16="http://schemas.microsoft.com/office/drawing/2014/main" xmlns="" id="{CAAEBE6E-3A68-80B3-D35B-3C75FCB33475}"/>
               </a:ext>
             </a:extLst>
           </p:cNvPr>
@@ -12886,7 +12934,7 @@
               <p:cNvPr id="4" name="Text Placeholder 3">
                 <a:extLst>
                   <a:ext uri="{FF2B5EF4-FFF2-40B4-BE49-F238E27FC236}">
-                    <a16:creationId xmlns:a16="http://schemas.microsoft.com/office/drawing/2014/main" id="{5BEA480C-3F31-782F-DFED-2235F5A9DAFA}"/>
+                    <a16:creationId xmlns:a16="http://schemas.microsoft.com/office/drawing/2014/main" xmlns="" id="{5BEA480C-3F31-782F-DFED-2235F5A9DAFA}"/>
                   </a:ext>
                 </a:extLst>
               </p:cNvPr>
@@ -13255,7 +13303,7 @@
           <p:cNvPr id="3" name="Picture 2">
             <a:extLst>
               <a:ext uri="{FF2B5EF4-FFF2-40B4-BE49-F238E27FC236}">
-                <a16:creationId xmlns:a16="http://schemas.microsoft.com/office/drawing/2014/main" id="{644BA63D-5A13-5BC5-50EA-7563FB9C67EB}"/>
+                <a16:creationId xmlns:a16="http://schemas.microsoft.com/office/drawing/2014/main" xmlns="" id="{644BA63D-5A13-5BC5-50EA-7563FB9C67EB}"/>
               </a:ext>
             </a:extLst>
           </p:cNvPr>
@@ -13301,7 +13349,7 @@
         <p:cNvPr id="1" name="">
           <a:extLst>
             <a:ext uri="{FF2B5EF4-FFF2-40B4-BE49-F238E27FC236}">
-              <a16:creationId xmlns:a16="http://schemas.microsoft.com/office/drawing/2014/main" id="{34E9D94E-548F-1500-C3C1-BA9F610D4853}"/>
+              <a16:creationId xmlns:a16="http://schemas.microsoft.com/office/drawing/2014/main" xmlns="" id="{34E9D94E-548F-1500-C3C1-BA9F610D4853}"/>
             </a:ext>
           </a:extLst>
         </p:cNvPr>
@@ -13321,7 +13369,7 @@
           <p:cNvPr id="2" name="Title 1">
             <a:extLst>
               <a:ext uri="{FF2B5EF4-FFF2-40B4-BE49-F238E27FC236}">
-                <a16:creationId xmlns:a16="http://schemas.microsoft.com/office/drawing/2014/main" id="{0467AA68-1FDE-4385-246C-3F50FA968006}"/>
+                <a16:creationId xmlns:a16="http://schemas.microsoft.com/office/drawing/2014/main" xmlns="" id="{0467AA68-1FDE-4385-246C-3F50FA968006}"/>
               </a:ext>
             </a:extLst>
           </p:cNvPr>
@@ -13367,7 +13415,7 @@
           <p:cNvPr id="3" name="Content Placeholder 2">
             <a:extLst>
               <a:ext uri="{FF2B5EF4-FFF2-40B4-BE49-F238E27FC236}">
-                <a16:creationId xmlns:a16="http://schemas.microsoft.com/office/drawing/2014/main" id="{3CF5ADA3-E584-AC70-7D39-AB74EC3294BB}"/>
+                <a16:creationId xmlns:a16="http://schemas.microsoft.com/office/drawing/2014/main" xmlns="" id="{3CF5ADA3-E584-AC70-7D39-AB74EC3294BB}"/>
               </a:ext>
             </a:extLst>
           </p:cNvPr>
@@ -13966,7 +14014,7 @@
         <p:cNvPr id="1" name="">
           <a:extLst>
             <a:ext uri="{FF2B5EF4-FFF2-40B4-BE49-F238E27FC236}">
-              <a16:creationId xmlns:a16="http://schemas.microsoft.com/office/drawing/2014/main" id="{3E19CFC3-4651-33F7-34AB-7D68790D97D7}"/>
+              <a16:creationId xmlns:a16="http://schemas.microsoft.com/office/drawing/2014/main" xmlns="" id="{3E19CFC3-4651-33F7-34AB-7D68790D97D7}"/>
             </a:ext>
           </a:extLst>
         </p:cNvPr>
@@ -13986,7 +14034,7 @@
           <p:cNvPr id="2" name="Title 1">
             <a:extLst>
               <a:ext uri="{FF2B5EF4-FFF2-40B4-BE49-F238E27FC236}">
-                <a16:creationId xmlns:a16="http://schemas.microsoft.com/office/drawing/2014/main" id="{F79633E5-5079-0B93-0278-16157D788A83}"/>
+                <a16:creationId xmlns:a16="http://schemas.microsoft.com/office/drawing/2014/main" xmlns="" id="{F79633E5-5079-0B93-0278-16157D788A83}"/>
               </a:ext>
             </a:extLst>
           </p:cNvPr>
@@ -14032,7 +14080,7 @@
           <p:cNvPr id="3" name="Content Placeholder 2">
             <a:extLst>
               <a:ext uri="{FF2B5EF4-FFF2-40B4-BE49-F238E27FC236}">
-                <a16:creationId xmlns:a16="http://schemas.microsoft.com/office/drawing/2014/main" id="{F7C7E03F-9369-4C97-CF34-FCF8E287AA5B}"/>
+                <a16:creationId xmlns:a16="http://schemas.microsoft.com/office/drawing/2014/main" xmlns="" id="{F7C7E03F-9369-4C97-CF34-FCF8E287AA5B}"/>
               </a:ext>
             </a:extLst>
           </p:cNvPr>
@@ -14064,15 +14112,19 @@
             </a:r>
             <a:r>
               <a:rPr lang="en-US" dirty="0"/>
-              <a:t> show pooled </a:t>
-            </a:r>
-            <a:r>
-              <a:rPr lang="en-US" b="1" dirty="0" err="1"/>
-              <a:t>hypterprior</a:t>
+              <a:t> show </a:t>
+            </a:r>
+            <a:r>
+              <a:rPr lang="en-US"/>
+              <a:t>pooled </a:t>
+            </a:r>
+            <a:r>
+              <a:rPr lang="en-US" b="1" smtClean="0"/>
+              <a:t>hyperprior </a:t>
             </a:r>
             <a:r>
               <a:rPr lang="en-US" b="1" dirty="0"/>
-              <a:t> distribution </a:t>
+              <a:t>distribution </a:t>
             </a:r>
             <a:r>
               <a:rPr lang="en-US" dirty="0"/>
@@ -14106,7 +14158,7 @@
           <p:cNvPr id="6" name="Text Placeholder 3">
             <a:extLst>
               <a:ext uri="{FF2B5EF4-FFF2-40B4-BE49-F238E27FC236}">
-                <a16:creationId xmlns:a16="http://schemas.microsoft.com/office/drawing/2014/main" id="{DC5C3EEB-76D0-ACFC-98E8-139D2D7DFC87}"/>
+                <a16:creationId xmlns:a16="http://schemas.microsoft.com/office/drawing/2014/main" xmlns="" id="{DC5C3EEB-76D0-ACFC-98E8-139D2D7DFC87}"/>
               </a:ext>
             </a:extLst>
           </p:cNvPr>
@@ -14298,7 +14350,7 @@
           <p:cNvPr id="5" name="Picture 4">
             <a:extLst>
               <a:ext uri="{FF2B5EF4-FFF2-40B4-BE49-F238E27FC236}">
-                <a16:creationId xmlns:a16="http://schemas.microsoft.com/office/drawing/2014/main" id="{3FD19437-8AE1-4EB8-071B-F450A5220E72}"/>
+                <a16:creationId xmlns:a16="http://schemas.microsoft.com/office/drawing/2014/main" xmlns="" id="{3FD19437-8AE1-4EB8-071B-F450A5220E72}"/>
               </a:ext>
             </a:extLst>
           </p:cNvPr>
@@ -14344,7 +14396,7 @@
         <p:cNvPr id="1" name="">
           <a:extLst>
             <a:ext uri="{FF2B5EF4-FFF2-40B4-BE49-F238E27FC236}">
-              <a16:creationId xmlns:a16="http://schemas.microsoft.com/office/drawing/2014/main" id="{846FF0A5-E3A8-718E-36E9-59C101D02F99}"/>
+              <a16:creationId xmlns:a16="http://schemas.microsoft.com/office/drawing/2014/main" xmlns="" id="{846FF0A5-E3A8-718E-36E9-59C101D02F99}"/>
             </a:ext>
           </a:extLst>
         </p:cNvPr>
@@ -14364,7 +14416,7 @@
           <p:cNvPr id="2" name="Title 1">
             <a:extLst>
               <a:ext uri="{FF2B5EF4-FFF2-40B4-BE49-F238E27FC236}">
-                <a16:creationId xmlns:a16="http://schemas.microsoft.com/office/drawing/2014/main" id="{B6FD22B6-FFF7-C66E-A6F9-0CDDC70EE2E8}"/>
+                <a16:creationId xmlns:a16="http://schemas.microsoft.com/office/drawing/2014/main" xmlns="" id="{B6FD22B6-FFF7-C66E-A6F9-0CDDC70EE2E8}"/>
               </a:ext>
             </a:extLst>
           </p:cNvPr>
@@ -14408,7 +14460,7 @@
               <p:cNvPr id="4" name="Text Placeholder 3">
                 <a:extLst>
                   <a:ext uri="{FF2B5EF4-FFF2-40B4-BE49-F238E27FC236}">
-                    <a16:creationId xmlns:a16="http://schemas.microsoft.com/office/drawing/2014/main" id="{07B48BCC-929D-59A7-D8F7-032E1216A8D0}"/>
+                    <a16:creationId xmlns:a16="http://schemas.microsoft.com/office/drawing/2014/main" xmlns="" id="{07B48BCC-929D-59A7-D8F7-032E1216A8D0}"/>
                   </a:ext>
                 </a:extLst>
               </p:cNvPr>
@@ -14882,7 +14934,7 @@
           <p:cNvPr id="5" name="Picture 4">
             <a:extLst>
               <a:ext uri="{FF2B5EF4-FFF2-40B4-BE49-F238E27FC236}">
-                <a16:creationId xmlns:a16="http://schemas.microsoft.com/office/drawing/2014/main" id="{1540D032-8D48-5669-5A6A-BC244A3972E3}"/>
+                <a16:creationId xmlns:a16="http://schemas.microsoft.com/office/drawing/2014/main" xmlns="" id="{1540D032-8D48-5669-5A6A-BC244A3972E3}"/>
               </a:ext>
             </a:extLst>
           </p:cNvPr>
@@ -14928,7 +14980,7 @@
         <p:cNvPr id="1" name="">
           <a:extLst>
             <a:ext uri="{FF2B5EF4-FFF2-40B4-BE49-F238E27FC236}">
-              <a16:creationId xmlns:a16="http://schemas.microsoft.com/office/drawing/2014/main" id="{85E28876-8B38-47CB-2F55-F7DAB77F2C3C}"/>
+              <a16:creationId xmlns:a16="http://schemas.microsoft.com/office/drawing/2014/main" xmlns="" id="{85E28876-8B38-47CB-2F55-F7DAB77F2C3C}"/>
             </a:ext>
           </a:extLst>
         </p:cNvPr>
@@ -14948,7 +15000,7 @@
           <p:cNvPr id="2" name="Title 1">
             <a:extLst>
               <a:ext uri="{FF2B5EF4-FFF2-40B4-BE49-F238E27FC236}">
-                <a16:creationId xmlns:a16="http://schemas.microsoft.com/office/drawing/2014/main" id="{9245EEA4-2376-DF05-5D22-3299BB2B1D80}"/>
+                <a16:creationId xmlns:a16="http://schemas.microsoft.com/office/drawing/2014/main" xmlns="" id="{9245EEA4-2376-DF05-5D22-3299BB2B1D80}"/>
               </a:ext>
             </a:extLst>
           </p:cNvPr>
@@ -14990,7 +15042,7 @@
           <p:cNvPr id="4" name="Text Placeholder 3">
             <a:extLst>
               <a:ext uri="{FF2B5EF4-FFF2-40B4-BE49-F238E27FC236}">
-                <a16:creationId xmlns:a16="http://schemas.microsoft.com/office/drawing/2014/main" id="{91DAF7FD-2628-E1A7-FB33-FBAFBA2296BE}"/>
+                <a16:creationId xmlns:a16="http://schemas.microsoft.com/office/drawing/2014/main" xmlns="" id="{91DAF7FD-2628-E1A7-FB33-FBAFBA2296BE}"/>
               </a:ext>
             </a:extLst>
           </p:cNvPr>
@@ -15053,7 +15105,7 @@
           <p:cNvPr id="5" name="Picture 4">
             <a:extLst>
               <a:ext uri="{FF2B5EF4-FFF2-40B4-BE49-F238E27FC236}">
-                <a16:creationId xmlns:a16="http://schemas.microsoft.com/office/drawing/2014/main" id="{698BD11B-BCBB-6355-C9CB-AFCE146F6947}"/>
+                <a16:creationId xmlns:a16="http://schemas.microsoft.com/office/drawing/2014/main" xmlns="" id="{698BD11B-BCBB-6355-C9CB-AFCE146F6947}"/>
               </a:ext>
             </a:extLst>
           </p:cNvPr>
@@ -15099,7 +15151,7 @@
         <p:cNvPr id="1" name="">
           <a:extLst>
             <a:ext uri="{FF2B5EF4-FFF2-40B4-BE49-F238E27FC236}">
-              <a16:creationId xmlns:a16="http://schemas.microsoft.com/office/drawing/2014/main" id="{06FBF5FC-A955-9949-6B5A-EE572AE018A1}"/>
+              <a16:creationId xmlns:a16="http://schemas.microsoft.com/office/drawing/2014/main" xmlns="" id="{06FBF5FC-A955-9949-6B5A-EE572AE018A1}"/>
             </a:ext>
           </a:extLst>
         </p:cNvPr>
@@ -15119,7 +15171,7 @@
           <p:cNvPr id="2" name="Title 1">
             <a:extLst>
               <a:ext uri="{FF2B5EF4-FFF2-40B4-BE49-F238E27FC236}">
-                <a16:creationId xmlns:a16="http://schemas.microsoft.com/office/drawing/2014/main" id="{CF122B0C-96A4-9FDE-B70B-D9ACD3EE59E2}"/>
+                <a16:creationId xmlns:a16="http://schemas.microsoft.com/office/drawing/2014/main" xmlns="" id="{CF122B0C-96A4-9FDE-B70B-D9ACD3EE59E2}"/>
               </a:ext>
             </a:extLst>
           </p:cNvPr>
@@ -15175,7 +15227,7 @@
               <p:cNvPr id="3" name="Content Placeholder 2">
                 <a:extLst>
                   <a:ext uri="{FF2B5EF4-FFF2-40B4-BE49-F238E27FC236}">
-                    <a16:creationId xmlns:a16="http://schemas.microsoft.com/office/drawing/2014/main" id="{E72BF89E-FA59-33B3-3C6A-D88AAB441056}"/>
+                    <a16:creationId xmlns:a16="http://schemas.microsoft.com/office/drawing/2014/main" xmlns="" id="{E72BF89E-FA59-33B3-3C6A-D88AAB441056}"/>
                   </a:ext>
                 </a:extLst>
               </p:cNvPr>
@@ -15435,7 +15487,7 @@
           <p:cNvPr id="7" name="Picture 6">
             <a:extLst>
               <a:ext uri="{FF2B5EF4-FFF2-40B4-BE49-F238E27FC236}">
-                <a16:creationId xmlns:a16="http://schemas.microsoft.com/office/drawing/2014/main" id="{F2BDCBED-DDF4-6FA9-B237-02B85084E848}"/>
+                <a16:creationId xmlns:a16="http://schemas.microsoft.com/office/drawing/2014/main" xmlns="" id="{F2BDCBED-DDF4-6FA9-B237-02B85084E848}"/>
               </a:ext>
             </a:extLst>
           </p:cNvPr>
@@ -15481,7 +15533,7 @@
         <p:cNvPr id="1" name="">
           <a:extLst>
             <a:ext uri="{FF2B5EF4-FFF2-40B4-BE49-F238E27FC236}">
-              <a16:creationId xmlns:a16="http://schemas.microsoft.com/office/drawing/2014/main" id="{AB2AE872-AAFA-100C-3D30-EF79BCE698FE}"/>
+              <a16:creationId xmlns:a16="http://schemas.microsoft.com/office/drawing/2014/main" xmlns="" id="{AB2AE872-AAFA-100C-3D30-EF79BCE698FE}"/>
             </a:ext>
           </a:extLst>
         </p:cNvPr>
@@ -15501,7 +15553,7 @@
           <p:cNvPr id="2" name="Title 1">
             <a:extLst>
               <a:ext uri="{FF2B5EF4-FFF2-40B4-BE49-F238E27FC236}">
-                <a16:creationId xmlns:a16="http://schemas.microsoft.com/office/drawing/2014/main" id="{1F390AE7-0B8B-69F7-009D-A1C7DE790B63}"/>
+                <a16:creationId xmlns:a16="http://schemas.microsoft.com/office/drawing/2014/main" xmlns="" id="{1F390AE7-0B8B-69F7-009D-A1C7DE790B63}"/>
               </a:ext>
             </a:extLst>
           </p:cNvPr>
@@ -15540,7 +15592,7 @@
           <p:cNvPr id="3" name="Content Placeholder 2">
             <a:extLst>
               <a:ext uri="{FF2B5EF4-FFF2-40B4-BE49-F238E27FC236}">
-                <a16:creationId xmlns:a16="http://schemas.microsoft.com/office/drawing/2014/main" id="{59A075C2-EAB0-6DA7-79D7-08E26D3C068E}"/>
+                <a16:creationId xmlns:a16="http://schemas.microsoft.com/office/drawing/2014/main" xmlns="" id="{59A075C2-EAB0-6DA7-79D7-08E26D3C068E}"/>
               </a:ext>
             </a:extLst>
           </p:cNvPr>
@@ -15594,7 +15646,7 @@
           <p:cNvPr id="5" name="Picture 4">
             <a:extLst>
               <a:ext uri="{FF2B5EF4-FFF2-40B4-BE49-F238E27FC236}">
-                <a16:creationId xmlns:a16="http://schemas.microsoft.com/office/drawing/2014/main" id="{2B977901-465F-63F8-2F78-71E4CA1EE348}"/>
+                <a16:creationId xmlns:a16="http://schemas.microsoft.com/office/drawing/2014/main" xmlns="" id="{2B977901-465F-63F8-2F78-71E4CA1EE348}"/>
               </a:ext>
             </a:extLst>
           </p:cNvPr>
@@ -15640,7 +15692,7 @@
         <p:cNvPr id="1" name="">
           <a:extLst>
             <a:ext uri="{FF2B5EF4-FFF2-40B4-BE49-F238E27FC236}">
-              <a16:creationId xmlns:a16="http://schemas.microsoft.com/office/drawing/2014/main" id="{8168B500-24A0-6B9E-5D5E-A1F467799CB9}"/>
+              <a16:creationId xmlns:a16="http://schemas.microsoft.com/office/drawing/2014/main" xmlns="" id="{8168B500-24A0-6B9E-5D5E-A1F467799CB9}"/>
             </a:ext>
           </a:extLst>
         </p:cNvPr>
@@ -15660,7 +15712,7 @@
           <p:cNvPr id="2" name="Title 1">
             <a:extLst>
               <a:ext uri="{FF2B5EF4-FFF2-40B4-BE49-F238E27FC236}">
-                <a16:creationId xmlns:a16="http://schemas.microsoft.com/office/drawing/2014/main" id="{383F1448-D32B-3230-F841-6E698FF525C2}"/>
+                <a16:creationId xmlns:a16="http://schemas.microsoft.com/office/drawing/2014/main" xmlns="" id="{383F1448-D32B-3230-F841-6E698FF525C2}"/>
               </a:ext>
             </a:extLst>
           </p:cNvPr>
@@ -15710,7 +15762,7 @@
           <p:cNvPr id="3" name="Content Placeholder 2">
             <a:extLst>
               <a:ext uri="{FF2B5EF4-FFF2-40B4-BE49-F238E27FC236}">
-                <a16:creationId xmlns:a16="http://schemas.microsoft.com/office/drawing/2014/main" id="{080D003D-4566-1241-67DA-0D0B48EC4CA8}"/>
+                <a16:creationId xmlns:a16="http://schemas.microsoft.com/office/drawing/2014/main" xmlns="" id="{080D003D-4566-1241-67DA-0D0B48EC4CA8}"/>
               </a:ext>
             </a:extLst>
           </p:cNvPr>
@@ -15784,7 +15836,7 @@
           <p:cNvPr id="6" name="Picture 5">
             <a:extLst>
               <a:ext uri="{FF2B5EF4-FFF2-40B4-BE49-F238E27FC236}">
-                <a16:creationId xmlns:a16="http://schemas.microsoft.com/office/drawing/2014/main" id="{652066CF-7023-157E-8CE8-F3456079D5D8}"/>
+                <a16:creationId xmlns:a16="http://schemas.microsoft.com/office/drawing/2014/main" xmlns="" id="{652066CF-7023-157E-8CE8-F3456079D5D8}"/>
               </a:ext>
             </a:extLst>
           </p:cNvPr>
@@ -15830,7 +15882,7 @@
         <p:cNvPr id="1" name="">
           <a:extLst>
             <a:ext uri="{FF2B5EF4-FFF2-40B4-BE49-F238E27FC236}">
-              <a16:creationId xmlns:a16="http://schemas.microsoft.com/office/drawing/2014/main" id="{FD29014D-AB76-8DD3-2A2D-959948837B79}"/>
+              <a16:creationId xmlns:a16="http://schemas.microsoft.com/office/drawing/2014/main" xmlns="" id="{FD29014D-AB76-8DD3-2A2D-959948837B79}"/>
             </a:ext>
           </a:extLst>
         </p:cNvPr>
@@ -15850,7 +15902,7 @@
           <p:cNvPr id="2" name="Title 1">
             <a:extLst>
               <a:ext uri="{FF2B5EF4-FFF2-40B4-BE49-F238E27FC236}">
-                <a16:creationId xmlns:a16="http://schemas.microsoft.com/office/drawing/2014/main" id="{A275A209-D5EC-2178-53CF-53F34C2B777F}"/>
+                <a16:creationId xmlns:a16="http://schemas.microsoft.com/office/drawing/2014/main" xmlns="" id="{A275A209-D5EC-2178-53CF-53F34C2B777F}"/>
               </a:ext>
             </a:extLst>
           </p:cNvPr>
@@ -15909,7 +15961,7 @@
               <p:cNvPr id="5" name="Content Placeholder 2">
                 <a:extLst>
                   <a:ext uri="{FF2B5EF4-FFF2-40B4-BE49-F238E27FC236}">
-                    <a16:creationId xmlns:a16="http://schemas.microsoft.com/office/drawing/2014/main" id="{384600DB-9344-FE47-1A00-218FA5C37819}"/>
+                    <a16:creationId xmlns:a16="http://schemas.microsoft.com/office/drawing/2014/main" xmlns="" id="{384600DB-9344-FE47-1A00-218FA5C37819}"/>
                   </a:ext>
                 </a:extLst>
               </p:cNvPr>
@@ -16082,7 +16134,7 @@
           <p:cNvPr id="6" name="Picture 5">
             <a:extLst>
               <a:ext uri="{FF2B5EF4-FFF2-40B4-BE49-F238E27FC236}">
-                <a16:creationId xmlns:a16="http://schemas.microsoft.com/office/drawing/2014/main" id="{DBE3AE22-DEC0-2009-0D8C-5C22DCBE4518}"/>
+                <a16:creationId xmlns:a16="http://schemas.microsoft.com/office/drawing/2014/main" xmlns="" id="{DBE3AE22-DEC0-2009-0D8C-5C22DCBE4518}"/>
               </a:ext>
             </a:extLst>
           </p:cNvPr>
@@ -16112,7 +16164,7 @@
           <p:cNvPr id="8" name="Picture 7">
             <a:extLst>
               <a:ext uri="{FF2B5EF4-FFF2-40B4-BE49-F238E27FC236}">
-                <a16:creationId xmlns:a16="http://schemas.microsoft.com/office/drawing/2014/main" id="{CAA4DE9B-31A8-4C83-5757-08F460198C2C}"/>
+                <a16:creationId xmlns:a16="http://schemas.microsoft.com/office/drawing/2014/main" xmlns="" id="{CAA4DE9B-31A8-4C83-5757-08F460198C2C}"/>
               </a:ext>
             </a:extLst>
           </p:cNvPr>
@@ -16286,7 +16338,7 @@
         <p:cNvPr id="1" name="">
           <a:extLst>
             <a:ext uri="{FF2B5EF4-FFF2-40B4-BE49-F238E27FC236}">
-              <a16:creationId xmlns:a16="http://schemas.microsoft.com/office/drawing/2014/main" id="{56E0F372-6A7A-0F50-A8F3-9E960FF9472C}"/>
+              <a16:creationId xmlns:a16="http://schemas.microsoft.com/office/drawing/2014/main" xmlns="" id="{56E0F372-6A7A-0F50-A8F3-9E960FF9472C}"/>
             </a:ext>
           </a:extLst>
         </p:cNvPr>
@@ -16306,7 +16358,7 @@
           <p:cNvPr id="2" name="Title 1">
             <a:extLst>
               <a:ext uri="{FF2B5EF4-FFF2-40B4-BE49-F238E27FC236}">
-                <a16:creationId xmlns:a16="http://schemas.microsoft.com/office/drawing/2014/main" id="{6DFCA312-4AA3-94A6-9187-FF872249A3D7}"/>
+                <a16:creationId xmlns:a16="http://schemas.microsoft.com/office/drawing/2014/main" xmlns="" id="{6DFCA312-4AA3-94A6-9187-FF872249A3D7}"/>
               </a:ext>
             </a:extLst>
           </p:cNvPr>
@@ -16358,14 +16410,14 @@
           </a:p>
         </p:txBody>
       </p:sp>
-      <mc:AlternateContent xmlns:mc="http://schemas.openxmlformats.org/markup-compatibility/2006">
-        <mc:Choice xmlns:a14="http://schemas.microsoft.com/office/drawing/2010/main" Requires="a14">
+      <mc:AlternateContent xmlns:mc="http://schemas.openxmlformats.org/markup-compatibility/2006" xmlns:a14="http://schemas.microsoft.com/office/drawing/2010/main">
+        <mc:Choice Requires="a14">
           <p:sp>
             <p:nvSpPr>
               <p:cNvPr id="5" name="Content Placeholder 2">
                 <a:extLst>
                   <a:ext uri="{FF2B5EF4-FFF2-40B4-BE49-F238E27FC236}">
-                    <a16:creationId xmlns:a16="http://schemas.microsoft.com/office/drawing/2014/main" id="{B55BE0DB-2EB2-8348-E665-516CB1AA494D}"/>
+                    <a16:creationId xmlns:a16="http://schemas.microsoft.com/office/drawing/2014/main" xmlns="" id="{B55BE0DB-2EB2-8348-E665-516CB1AA494D}"/>
                   </a:ext>
                 </a:extLst>
               </p:cNvPr>
@@ -16473,7 +16525,7 @@
             </p:txBody>
           </p:sp>
         </mc:Choice>
-        <mc:Fallback>
+        <mc:Fallback xmlns="">
           <p:sp>
             <p:nvSpPr>
               <p:cNvPr id="5" name="Content Placeholder 2">
@@ -16522,7 +16574,7 @@
           <p:cNvPr id="4" name="Picture 3">
             <a:extLst>
               <a:ext uri="{FF2B5EF4-FFF2-40B4-BE49-F238E27FC236}">
-                <a16:creationId xmlns:a16="http://schemas.microsoft.com/office/drawing/2014/main" id="{644A5D4D-09C9-5FCC-7742-298B62E0954E}"/>
+                <a16:creationId xmlns:a16="http://schemas.microsoft.com/office/drawing/2014/main" xmlns="" id="{644A5D4D-09C9-5FCC-7742-298B62E0954E}"/>
               </a:ext>
             </a:extLst>
           </p:cNvPr>
@@ -16568,7 +16620,7 @@
         <p:cNvPr id="1" name="">
           <a:extLst>
             <a:ext uri="{FF2B5EF4-FFF2-40B4-BE49-F238E27FC236}">
-              <a16:creationId xmlns:a16="http://schemas.microsoft.com/office/drawing/2014/main" id="{1B49F992-FE2F-0E65-535B-0D22F100D407}"/>
+              <a16:creationId xmlns:a16="http://schemas.microsoft.com/office/drawing/2014/main" xmlns="" id="{1B49F992-FE2F-0E65-535B-0D22F100D407}"/>
             </a:ext>
           </a:extLst>
         </p:cNvPr>
@@ -16588,7 +16640,7 @@
           <p:cNvPr id="2" name="Title 1">
             <a:extLst>
               <a:ext uri="{FF2B5EF4-FFF2-40B4-BE49-F238E27FC236}">
-                <a16:creationId xmlns:a16="http://schemas.microsoft.com/office/drawing/2014/main" id="{6FE6623B-08E2-8465-E4FF-C66CABCF1E5D}"/>
+                <a16:creationId xmlns:a16="http://schemas.microsoft.com/office/drawing/2014/main" xmlns="" id="{6FE6623B-08E2-8465-E4FF-C66CABCF1E5D}"/>
               </a:ext>
             </a:extLst>
           </p:cNvPr>
@@ -16623,7 +16675,7 @@
           <p:cNvPr id="3" name="Content Placeholder 2">
             <a:extLst>
               <a:ext uri="{FF2B5EF4-FFF2-40B4-BE49-F238E27FC236}">
-                <a16:creationId xmlns:a16="http://schemas.microsoft.com/office/drawing/2014/main" id="{17E68B2F-AB31-A531-3089-BF0E07F7CB3F}"/>
+                <a16:creationId xmlns:a16="http://schemas.microsoft.com/office/drawing/2014/main" xmlns="" id="{17E68B2F-AB31-A531-3089-BF0E07F7CB3F}"/>
               </a:ext>
             </a:extLst>
           </p:cNvPr>
@@ -16726,7 +16778,7 @@
         <p:cNvPr id="1" name="">
           <a:extLst>
             <a:ext uri="{FF2B5EF4-FFF2-40B4-BE49-F238E27FC236}">
-              <a16:creationId xmlns:a16="http://schemas.microsoft.com/office/drawing/2014/main" id="{44F52D4F-D7D4-9C96-4FF6-9A3972F43DBC}"/>
+              <a16:creationId xmlns:a16="http://schemas.microsoft.com/office/drawing/2014/main" xmlns="" id="{44F52D4F-D7D4-9C96-4FF6-9A3972F43DBC}"/>
             </a:ext>
           </a:extLst>
         </p:cNvPr>
@@ -16746,7 +16798,7 @@
           <p:cNvPr id="2" name="Title 1">
             <a:extLst>
               <a:ext uri="{FF2B5EF4-FFF2-40B4-BE49-F238E27FC236}">
-                <a16:creationId xmlns:a16="http://schemas.microsoft.com/office/drawing/2014/main" id="{46D85F04-592B-60CA-36E7-D2F0AA89340F}"/>
+                <a16:creationId xmlns:a16="http://schemas.microsoft.com/office/drawing/2014/main" xmlns="" id="{46D85F04-592B-60CA-36E7-D2F0AA89340F}"/>
               </a:ext>
             </a:extLst>
           </p:cNvPr>
@@ -16788,7 +16840,7 @@
               <p:cNvPr id="3" name="Content Placeholder 2">
                 <a:extLst>
                   <a:ext uri="{FF2B5EF4-FFF2-40B4-BE49-F238E27FC236}">
-                    <a16:creationId xmlns:a16="http://schemas.microsoft.com/office/drawing/2014/main" id="{0C0A890D-60CE-D403-7347-19CA6740CE20}"/>
+                    <a16:creationId xmlns:a16="http://schemas.microsoft.com/office/drawing/2014/main" xmlns="" id="{0C0A890D-60CE-D403-7347-19CA6740CE20}"/>
                   </a:ext>
                 </a:extLst>
               </p:cNvPr>
@@ -17670,7 +17722,7 @@
         <p:cNvPr id="1" name="">
           <a:extLst>
             <a:ext uri="{FF2B5EF4-FFF2-40B4-BE49-F238E27FC236}">
-              <a16:creationId xmlns:a16="http://schemas.microsoft.com/office/drawing/2014/main" id="{53AFE731-6F8C-B3F7-6BFC-48AF9E14FC03}"/>
+              <a16:creationId xmlns:a16="http://schemas.microsoft.com/office/drawing/2014/main" xmlns="" id="{53AFE731-6F8C-B3F7-6BFC-48AF9E14FC03}"/>
             </a:ext>
           </a:extLst>
         </p:cNvPr>
@@ -17690,7 +17742,7 @@
           <p:cNvPr id="2" name="Title 1">
             <a:extLst>
               <a:ext uri="{FF2B5EF4-FFF2-40B4-BE49-F238E27FC236}">
-                <a16:creationId xmlns:a16="http://schemas.microsoft.com/office/drawing/2014/main" id="{8872A8E6-83B5-B6F9-7F79-2CFC58D16C7F}"/>
+                <a16:creationId xmlns:a16="http://schemas.microsoft.com/office/drawing/2014/main" xmlns="" id="{8872A8E6-83B5-B6F9-7F79-2CFC58D16C7F}"/>
               </a:ext>
             </a:extLst>
           </p:cNvPr>
@@ -17734,7 +17786,7 @@
               <p:cNvPr id="3" name="Content Placeholder 2">
                 <a:extLst>
                   <a:ext uri="{FF2B5EF4-FFF2-40B4-BE49-F238E27FC236}">
-                    <a16:creationId xmlns:a16="http://schemas.microsoft.com/office/drawing/2014/main" id="{060452E7-B39E-7F8B-FF9C-1FFD372FEFAE}"/>
+                    <a16:creationId xmlns:a16="http://schemas.microsoft.com/office/drawing/2014/main" xmlns="" id="{060452E7-B39E-7F8B-FF9C-1FFD372FEFAE}"/>
                   </a:ext>
                 </a:extLst>
               </p:cNvPr>
@@ -18765,7 +18817,7 @@
         <p:cNvPr id="1" name="">
           <a:extLst>
             <a:ext uri="{FF2B5EF4-FFF2-40B4-BE49-F238E27FC236}">
-              <a16:creationId xmlns:a16="http://schemas.microsoft.com/office/drawing/2014/main" id="{F5F63B33-B5CA-1DE5-A604-CA650F8B1CD3}"/>
+              <a16:creationId xmlns:a16="http://schemas.microsoft.com/office/drawing/2014/main" xmlns="" id="{F5F63B33-B5CA-1DE5-A604-CA650F8B1CD3}"/>
             </a:ext>
           </a:extLst>
         </p:cNvPr>
@@ -18785,7 +18837,7 @@
           <p:cNvPr id="2" name="Title 1">
             <a:extLst>
               <a:ext uri="{FF2B5EF4-FFF2-40B4-BE49-F238E27FC236}">
-                <a16:creationId xmlns:a16="http://schemas.microsoft.com/office/drawing/2014/main" id="{F7F24A19-EA31-62ED-2FB6-506A20B1BB15}"/>
+                <a16:creationId xmlns:a16="http://schemas.microsoft.com/office/drawing/2014/main" xmlns="" id="{F7F24A19-EA31-62ED-2FB6-506A20B1BB15}"/>
               </a:ext>
             </a:extLst>
           </p:cNvPr>
@@ -18820,7 +18872,7 @@
           <p:cNvPr id="3" name="Content Placeholder 2">
             <a:extLst>
               <a:ext uri="{FF2B5EF4-FFF2-40B4-BE49-F238E27FC236}">
-                <a16:creationId xmlns:a16="http://schemas.microsoft.com/office/drawing/2014/main" id="{C9694A50-832C-2F70-7CF5-FBDA556EB076}"/>
+                <a16:creationId xmlns:a16="http://schemas.microsoft.com/office/drawing/2014/main" xmlns="" id="{C9694A50-832C-2F70-7CF5-FBDA556EB076}"/>
               </a:ext>
             </a:extLst>
           </p:cNvPr>
@@ -18863,7 +18915,7 @@
           <p:cNvPr id="5" name="Picture 4">
             <a:extLst>
               <a:ext uri="{FF2B5EF4-FFF2-40B4-BE49-F238E27FC236}">
-                <a16:creationId xmlns:a16="http://schemas.microsoft.com/office/drawing/2014/main" id="{0079C2F1-0DDC-D10F-8319-B9A091116A31}"/>
+                <a16:creationId xmlns:a16="http://schemas.microsoft.com/office/drawing/2014/main" xmlns="" id="{0079C2F1-0DDC-D10F-8319-B9A091116A31}"/>
               </a:ext>
             </a:extLst>
           </p:cNvPr>
@@ -18895,7 +18947,7 @@
               <p:cNvPr id="6" name="Content Placeholder 2">
                 <a:extLst>
                   <a:ext uri="{FF2B5EF4-FFF2-40B4-BE49-F238E27FC236}">
-                    <a16:creationId xmlns:a16="http://schemas.microsoft.com/office/drawing/2014/main" id="{B55E6228-DD23-7AE3-5EB6-B2AC37767059}"/>
+                    <a16:creationId xmlns:a16="http://schemas.microsoft.com/office/drawing/2014/main" xmlns="" id="{B55E6228-DD23-7AE3-5EB6-B2AC37767059}"/>
                   </a:ext>
                 </a:extLst>
               </p:cNvPr>
@@ -19474,7 +19526,7 @@
         <p:cNvPr id="1" name="">
           <a:extLst>
             <a:ext uri="{FF2B5EF4-FFF2-40B4-BE49-F238E27FC236}">
-              <a16:creationId xmlns:a16="http://schemas.microsoft.com/office/drawing/2014/main" id="{64CA7A4E-A808-1C22-AF16-E4A16F6329DC}"/>
+              <a16:creationId xmlns:a16="http://schemas.microsoft.com/office/drawing/2014/main" xmlns="" id="{64CA7A4E-A808-1C22-AF16-E4A16F6329DC}"/>
             </a:ext>
           </a:extLst>
         </p:cNvPr>
@@ -19494,7 +19546,7 @@
           <p:cNvPr id="2" name="Title 1">
             <a:extLst>
               <a:ext uri="{FF2B5EF4-FFF2-40B4-BE49-F238E27FC236}">
-                <a16:creationId xmlns:a16="http://schemas.microsoft.com/office/drawing/2014/main" id="{77BFD1A6-10B7-5238-E753-39A1834518A6}"/>
+                <a16:creationId xmlns:a16="http://schemas.microsoft.com/office/drawing/2014/main" xmlns="" id="{77BFD1A6-10B7-5238-E753-39A1834518A6}"/>
               </a:ext>
             </a:extLst>
           </p:cNvPr>
@@ -19529,7 +19581,7 @@
           <p:cNvPr id="3" name="Content Placeholder 2">
             <a:extLst>
               <a:ext uri="{FF2B5EF4-FFF2-40B4-BE49-F238E27FC236}">
-                <a16:creationId xmlns:a16="http://schemas.microsoft.com/office/drawing/2014/main" id="{08F79AA0-5F6B-6B1C-E35A-75C33B89635B}"/>
+                <a16:creationId xmlns:a16="http://schemas.microsoft.com/office/drawing/2014/main" xmlns="" id="{08F79AA0-5F6B-6B1C-E35A-75C33B89635B}"/>
               </a:ext>
             </a:extLst>
           </p:cNvPr>
@@ -19572,7 +19624,7 @@
           <p:cNvPr id="6" name="Content Placeholder 2">
             <a:extLst>
               <a:ext uri="{FF2B5EF4-FFF2-40B4-BE49-F238E27FC236}">
-                <a16:creationId xmlns:a16="http://schemas.microsoft.com/office/drawing/2014/main" id="{0984339F-FFB8-AA03-88ED-90721C7059BF}"/>
+                <a16:creationId xmlns:a16="http://schemas.microsoft.com/office/drawing/2014/main" xmlns="" id="{0984339F-FFB8-AA03-88ED-90721C7059BF}"/>
               </a:ext>
             </a:extLst>
           </p:cNvPr>
@@ -19778,7 +19830,7 @@
           <p:cNvPr id="7" name="Picture 6">
             <a:extLst>
               <a:ext uri="{FF2B5EF4-FFF2-40B4-BE49-F238E27FC236}">
-                <a16:creationId xmlns:a16="http://schemas.microsoft.com/office/drawing/2014/main" id="{CC1E8063-F665-45B5-234F-7EF2BA30F7D7}"/>
+                <a16:creationId xmlns:a16="http://schemas.microsoft.com/office/drawing/2014/main" xmlns="" id="{CC1E8063-F665-45B5-234F-7EF2BA30F7D7}"/>
               </a:ext>
             </a:extLst>
           </p:cNvPr>
@@ -19824,7 +19876,7 @@
         <p:cNvPr id="1" name="">
           <a:extLst>
             <a:ext uri="{FF2B5EF4-FFF2-40B4-BE49-F238E27FC236}">
-              <a16:creationId xmlns:a16="http://schemas.microsoft.com/office/drawing/2014/main" id="{0EB0144C-E0B6-EA80-66D2-DC9D40094EEA}"/>
+              <a16:creationId xmlns:a16="http://schemas.microsoft.com/office/drawing/2014/main" xmlns="" id="{0EB0144C-E0B6-EA80-66D2-DC9D40094EEA}"/>
             </a:ext>
           </a:extLst>
         </p:cNvPr>
@@ -19844,7 +19896,7 @@
           <p:cNvPr id="2" name="Title 1">
             <a:extLst>
               <a:ext uri="{FF2B5EF4-FFF2-40B4-BE49-F238E27FC236}">
-                <a16:creationId xmlns:a16="http://schemas.microsoft.com/office/drawing/2014/main" id="{6E73D62D-EC9B-B7C9-BDCB-06B1C9958ABA}"/>
+                <a16:creationId xmlns:a16="http://schemas.microsoft.com/office/drawing/2014/main" xmlns="" id="{6E73D62D-EC9B-B7C9-BDCB-06B1C9958ABA}"/>
               </a:ext>
             </a:extLst>
           </p:cNvPr>
@@ -19879,7 +19931,7 @@
           <p:cNvPr id="3" name="Content Placeholder 2">
             <a:extLst>
               <a:ext uri="{FF2B5EF4-FFF2-40B4-BE49-F238E27FC236}">
-                <a16:creationId xmlns:a16="http://schemas.microsoft.com/office/drawing/2014/main" id="{5C91BC1A-EAB8-4777-871E-89630141078B}"/>
+                <a16:creationId xmlns:a16="http://schemas.microsoft.com/office/drawing/2014/main" xmlns="" id="{5C91BC1A-EAB8-4777-871E-89630141078B}"/>
               </a:ext>
             </a:extLst>
           </p:cNvPr>
@@ -19918,7 +19970,7 @@
           <p:cNvPr id="5" name="Picture 4">
             <a:extLst>
               <a:ext uri="{FF2B5EF4-FFF2-40B4-BE49-F238E27FC236}">
-                <a16:creationId xmlns:a16="http://schemas.microsoft.com/office/drawing/2014/main" id="{C9A88AAB-556C-D9BA-A75B-47EF2741611A}"/>
+                <a16:creationId xmlns:a16="http://schemas.microsoft.com/office/drawing/2014/main" xmlns="" id="{C9A88AAB-556C-D9BA-A75B-47EF2741611A}"/>
               </a:ext>
             </a:extLst>
           </p:cNvPr>
@@ -19950,7 +20002,7 @@
               <p:cNvPr id="6" name="Content Placeholder 2">
                 <a:extLst>
                   <a:ext uri="{FF2B5EF4-FFF2-40B4-BE49-F238E27FC236}">
-                    <a16:creationId xmlns:a16="http://schemas.microsoft.com/office/drawing/2014/main" id="{29DF0F12-F13C-739B-3987-A87BFBA19A7F}"/>
+                    <a16:creationId xmlns:a16="http://schemas.microsoft.com/office/drawing/2014/main" xmlns="" id="{29DF0F12-F13C-739B-3987-A87BFBA19A7F}"/>
                   </a:ext>
                 </a:extLst>
               </p:cNvPr>
@@ -20307,7 +20359,7 @@
         <p:cNvPr id="1" name="">
           <a:extLst>
             <a:ext uri="{FF2B5EF4-FFF2-40B4-BE49-F238E27FC236}">
-              <a16:creationId xmlns:a16="http://schemas.microsoft.com/office/drawing/2014/main" id="{C686BF31-A685-D23B-45B8-B0F961FC1D3D}"/>
+              <a16:creationId xmlns:a16="http://schemas.microsoft.com/office/drawing/2014/main" xmlns="" id="{C686BF31-A685-D23B-45B8-B0F961FC1D3D}"/>
             </a:ext>
           </a:extLst>
         </p:cNvPr>
@@ -20327,7 +20379,7 @@
           <p:cNvPr id="2" name="Title 1">
             <a:extLst>
               <a:ext uri="{FF2B5EF4-FFF2-40B4-BE49-F238E27FC236}">
-                <a16:creationId xmlns:a16="http://schemas.microsoft.com/office/drawing/2014/main" id="{43A2EA85-4E51-31A5-EEAD-68BA65625E85}"/>
+                <a16:creationId xmlns:a16="http://schemas.microsoft.com/office/drawing/2014/main" xmlns="" id="{43A2EA85-4E51-31A5-EEAD-68BA65625E85}"/>
               </a:ext>
             </a:extLst>
           </p:cNvPr>
@@ -20359,7 +20411,7 @@
           <p:cNvPr id="3" name="Content Placeholder 2">
             <a:extLst>
               <a:ext uri="{FF2B5EF4-FFF2-40B4-BE49-F238E27FC236}">
-                <a16:creationId xmlns:a16="http://schemas.microsoft.com/office/drawing/2014/main" id="{410B4EF3-E6D8-72F6-B11F-51014BF4C05C}"/>
+                <a16:creationId xmlns:a16="http://schemas.microsoft.com/office/drawing/2014/main" xmlns="" id="{410B4EF3-E6D8-72F6-B11F-51014BF4C05C}"/>
               </a:ext>
             </a:extLst>
           </p:cNvPr>
@@ -20482,7 +20534,7 @@
         <p:cNvPr id="1" name="">
           <a:extLst>
             <a:ext uri="{FF2B5EF4-FFF2-40B4-BE49-F238E27FC236}">
-              <a16:creationId xmlns:a16="http://schemas.microsoft.com/office/drawing/2014/main" id="{C9176B8B-D7D8-8A90-3770-481982D408BF}"/>
+              <a16:creationId xmlns:a16="http://schemas.microsoft.com/office/drawing/2014/main" xmlns="" id="{C9176B8B-D7D8-8A90-3770-481982D408BF}"/>
             </a:ext>
           </a:extLst>
         </p:cNvPr>
@@ -20502,7 +20554,7 @@
           <p:cNvPr id="2" name="Title 1">
             <a:extLst>
               <a:ext uri="{FF2B5EF4-FFF2-40B4-BE49-F238E27FC236}">
-                <a16:creationId xmlns:a16="http://schemas.microsoft.com/office/drawing/2014/main" id="{BA663F22-D4E5-5812-D186-640C419B688F}"/>
+                <a16:creationId xmlns:a16="http://schemas.microsoft.com/office/drawing/2014/main" xmlns="" id="{BA663F22-D4E5-5812-D186-640C419B688F}"/>
               </a:ext>
             </a:extLst>
           </p:cNvPr>
@@ -20534,7 +20586,7 @@
           <p:cNvPr id="3" name="Content Placeholder 2">
             <a:extLst>
               <a:ext uri="{FF2B5EF4-FFF2-40B4-BE49-F238E27FC236}">
-                <a16:creationId xmlns:a16="http://schemas.microsoft.com/office/drawing/2014/main" id="{2BE6C38B-FA62-B976-00D1-0DD645EE3894}"/>
+                <a16:creationId xmlns:a16="http://schemas.microsoft.com/office/drawing/2014/main" xmlns="" id="{2BE6C38B-FA62-B976-00D1-0DD645EE3894}"/>
               </a:ext>
             </a:extLst>
           </p:cNvPr>
@@ -20581,7 +20633,7 @@
           <p:cNvPr id="6" name="Content Placeholder 2">
             <a:extLst>
               <a:ext uri="{FF2B5EF4-FFF2-40B4-BE49-F238E27FC236}">
-                <a16:creationId xmlns:a16="http://schemas.microsoft.com/office/drawing/2014/main" id="{17A5C0FF-7BF0-8900-C1AB-E1F02D1125FB}"/>
+                <a16:creationId xmlns:a16="http://schemas.microsoft.com/office/drawing/2014/main" xmlns="" id="{17A5C0FF-7BF0-8900-C1AB-E1F02D1125FB}"/>
               </a:ext>
             </a:extLst>
           </p:cNvPr>
@@ -20779,7 +20831,7 @@
           <p:cNvPr id="5" name="Picture 4">
             <a:extLst>
               <a:ext uri="{FF2B5EF4-FFF2-40B4-BE49-F238E27FC236}">
-                <a16:creationId xmlns:a16="http://schemas.microsoft.com/office/drawing/2014/main" id="{D1775BD7-4794-5ECD-9C60-4480C3FEEA65}"/>
+                <a16:creationId xmlns:a16="http://schemas.microsoft.com/office/drawing/2014/main" xmlns="" id="{D1775BD7-4794-5ECD-9C60-4480C3FEEA65}"/>
               </a:ext>
             </a:extLst>
           </p:cNvPr>
@@ -20825,7 +20877,7 @@
         <p:cNvPr id="1" name="">
           <a:extLst>
             <a:ext uri="{FF2B5EF4-FFF2-40B4-BE49-F238E27FC236}">
-              <a16:creationId xmlns:a16="http://schemas.microsoft.com/office/drawing/2014/main" id="{F5ED5A5D-36B6-159F-FED2-14C486F84FE8}"/>
+              <a16:creationId xmlns:a16="http://schemas.microsoft.com/office/drawing/2014/main" xmlns="" id="{F5ED5A5D-36B6-159F-FED2-14C486F84FE8}"/>
             </a:ext>
           </a:extLst>
         </p:cNvPr>
@@ -20845,7 +20897,7 @@
           <p:cNvPr id="2" name="Title 1">
             <a:extLst>
               <a:ext uri="{FF2B5EF4-FFF2-40B4-BE49-F238E27FC236}">
-                <a16:creationId xmlns:a16="http://schemas.microsoft.com/office/drawing/2014/main" id="{203BA4AF-2C26-968B-592E-545A00D714FD}"/>
+                <a16:creationId xmlns:a16="http://schemas.microsoft.com/office/drawing/2014/main" xmlns="" id="{203BA4AF-2C26-968B-592E-545A00D714FD}"/>
               </a:ext>
             </a:extLst>
           </p:cNvPr>
@@ -20877,7 +20929,7 @@
           <p:cNvPr id="3" name="Content Placeholder 2">
             <a:extLst>
               <a:ext uri="{FF2B5EF4-FFF2-40B4-BE49-F238E27FC236}">
-                <a16:creationId xmlns:a16="http://schemas.microsoft.com/office/drawing/2014/main" id="{0F928D65-34F5-4EDF-FAE7-F19CF9FE839C}"/>
+                <a16:creationId xmlns:a16="http://schemas.microsoft.com/office/drawing/2014/main" xmlns="" id="{0F928D65-34F5-4EDF-FAE7-F19CF9FE839C}"/>
               </a:ext>
             </a:extLst>
           </p:cNvPr>
@@ -20924,7 +20976,7 @@
           <p:cNvPr id="6" name="Content Placeholder 2">
             <a:extLst>
               <a:ext uri="{FF2B5EF4-FFF2-40B4-BE49-F238E27FC236}">
-                <a16:creationId xmlns:a16="http://schemas.microsoft.com/office/drawing/2014/main" id="{56972BBF-585A-DA56-2BF7-67F1E4E0EC21}"/>
+                <a16:creationId xmlns:a16="http://schemas.microsoft.com/office/drawing/2014/main" xmlns="" id="{56972BBF-585A-DA56-2BF7-67F1E4E0EC21}"/>
               </a:ext>
             </a:extLst>
           </p:cNvPr>
@@ -21122,7 +21174,7 @@
           <p:cNvPr id="7" name="Picture 6">
             <a:extLst>
               <a:ext uri="{FF2B5EF4-FFF2-40B4-BE49-F238E27FC236}">
-                <a16:creationId xmlns:a16="http://schemas.microsoft.com/office/drawing/2014/main" id="{EA209510-6AE7-0232-0E02-50EAE3BEB3E1}"/>
+                <a16:creationId xmlns:a16="http://schemas.microsoft.com/office/drawing/2014/main" xmlns="" id="{EA209510-6AE7-0232-0E02-50EAE3BEB3E1}"/>
               </a:ext>
             </a:extLst>
           </p:cNvPr>
@@ -21323,7 +21375,7 @@
         <p:cNvPr id="1" name="">
           <a:extLst>
             <a:ext uri="{FF2B5EF4-FFF2-40B4-BE49-F238E27FC236}">
-              <a16:creationId xmlns:a16="http://schemas.microsoft.com/office/drawing/2014/main" id="{9CE155D6-A874-3286-B2E0-A8C1664EBAEC}"/>
+              <a16:creationId xmlns:a16="http://schemas.microsoft.com/office/drawing/2014/main" xmlns="" id="{9CE155D6-A874-3286-B2E0-A8C1664EBAEC}"/>
             </a:ext>
           </a:extLst>
         </p:cNvPr>
@@ -21343,7 +21395,7 @@
           <p:cNvPr id="2" name="Title 1">
             <a:extLst>
               <a:ext uri="{FF2B5EF4-FFF2-40B4-BE49-F238E27FC236}">
-                <a16:creationId xmlns:a16="http://schemas.microsoft.com/office/drawing/2014/main" id="{9253FD6E-A80B-DF8A-2179-0D34BB14B029}"/>
+                <a16:creationId xmlns:a16="http://schemas.microsoft.com/office/drawing/2014/main" xmlns="" id="{9253FD6E-A80B-DF8A-2179-0D34BB14B029}"/>
               </a:ext>
             </a:extLst>
           </p:cNvPr>
@@ -21375,7 +21427,7 @@
           <p:cNvPr id="3" name="Content Placeholder 2">
             <a:extLst>
               <a:ext uri="{FF2B5EF4-FFF2-40B4-BE49-F238E27FC236}">
-                <a16:creationId xmlns:a16="http://schemas.microsoft.com/office/drawing/2014/main" id="{3B17EC6D-6F9B-9A28-7634-095DBF453744}"/>
+                <a16:creationId xmlns:a16="http://schemas.microsoft.com/office/drawing/2014/main" xmlns="" id="{3B17EC6D-6F9B-9A28-7634-095DBF453744}"/>
               </a:ext>
             </a:extLst>
           </p:cNvPr>
@@ -21465,7 +21517,7 @@
         <p:cNvPr id="1" name="">
           <a:extLst>
             <a:ext uri="{FF2B5EF4-FFF2-40B4-BE49-F238E27FC236}">
-              <a16:creationId xmlns:a16="http://schemas.microsoft.com/office/drawing/2014/main" id="{F9E91774-BFB0-D14F-EA16-E4C79FFAAF44}"/>
+              <a16:creationId xmlns:a16="http://schemas.microsoft.com/office/drawing/2014/main" xmlns="" id="{F9E91774-BFB0-D14F-EA16-E4C79FFAAF44}"/>
             </a:ext>
           </a:extLst>
         </p:cNvPr>
@@ -21485,7 +21537,7 @@
           <p:cNvPr id="2" name="Title 1">
             <a:extLst>
               <a:ext uri="{FF2B5EF4-FFF2-40B4-BE49-F238E27FC236}">
-                <a16:creationId xmlns:a16="http://schemas.microsoft.com/office/drawing/2014/main" id="{8B4C784B-1DCF-5A7E-8B7E-FBE4FA8AA8B2}"/>
+                <a16:creationId xmlns:a16="http://schemas.microsoft.com/office/drawing/2014/main" xmlns="" id="{8B4C784B-1DCF-5A7E-8B7E-FBE4FA8AA8B2}"/>
               </a:ext>
             </a:extLst>
           </p:cNvPr>
@@ -21517,7 +21569,7 @@
           <p:cNvPr id="3" name="Content Placeholder 2">
             <a:extLst>
               <a:ext uri="{FF2B5EF4-FFF2-40B4-BE49-F238E27FC236}">
-                <a16:creationId xmlns:a16="http://schemas.microsoft.com/office/drawing/2014/main" id="{6CA9338F-D66D-ACAB-074B-B1962CAB3CF2}"/>
+                <a16:creationId xmlns:a16="http://schemas.microsoft.com/office/drawing/2014/main" xmlns="" id="{6CA9338F-D66D-ACAB-074B-B1962CAB3CF2}"/>
               </a:ext>
             </a:extLst>
           </p:cNvPr>
@@ -21845,8 +21897,8 @@
           </a:p>
         </p:txBody>
       </p:sp>
-      <mc:AlternateContent xmlns:mc="http://schemas.openxmlformats.org/markup-compatibility/2006">
-        <mc:Choice xmlns:a14="http://schemas.microsoft.com/office/drawing/2010/main" Requires="a14">
+      <mc:AlternateContent xmlns:mc="http://schemas.openxmlformats.org/markup-compatibility/2006" xmlns:a14="http://schemas.microsoft.com/office/drawing/2010/main">
+        <mc:Choice Requires="a14">
           <p:sp>
             <p:nvSpPr>
               <p:cNvPr id="3" name="Content Placeholder 2"/>
@@ -21934,7 +21986,7 @@
             </p:txBody>
           </p:sp>
         </mc:Choice>
-        <mc:Fallback>
+        <mc:Fallback xmlns="">
           <p:sp>
             <p:nvSpPr>
               <p:cNvPr id="3" name="Content Placeholder 2"/>
@@ -21977,7 +22029,7 @@
           <p:cNvPr id="4" name="TextBox 3">
             <a:extLst>
               <a:ext uri="{FF2B5EF4-FFF2-40B4-BE49-F238E27FC236}">
-                <a16:creationId xmlns:a16="http://schemas.microsoft.com/office/drawing/2014/main" id="{90C5D012-E0CC-848D-6410-CA646ABF0807}"/>
+                <a16:creationId xmlns:a16="http://schemas.microsoft.com/office/drawing/2014/main" xmlns="" id="{90C5D012-E0CC-848D-6410-CA646ABF0807}"/>
               </a:ext>
             </a:extLst>
           </p:cNvPr>
@@ -22039,7 +22091,7 @@
           <p:cNvPr id="1026" name="Picture 2">
             <a:extLst>
               <a:ext uri="{FF2B5EF4-FFF2-40B4-BE49-F238E27FC236}">
-                <a16:creationId xmlns:a16="http://schemas.microsoft.com/office/drawing/2014/main" id="{3CB009C1-ECDB-0CDD-ACC1-822E13A36596}"/>
+                <a16:creationId xmlns:a16="http://schemas.microsoft.com/office/drawing/2014/main" xmlns="" id="{3CB009C1-ECDB-0CDD-ACC1-822E13A36596}"/>
               </a:ext>
             </a:extLst>
           </p:cNvPr>
@@ -22086,7 +22138,7 @@
           <p:cNvPr id="5" name="Oval 4">
             <a:extLst>
               <a:ext uri="{FF2B5EF4-FFF2-40B4-BE49-F238E27FC236}">
-                <a16:creationId xmlns:a16="http://schemas.microsoft.com/office/drawing/2014/main" id="{CE43F05F-7F8E-C1C6-0475-33D5742F8081}"/>
+                <a16:creationId xmlns:a16="http://schemas.microsoft.com/office/drawing/2014/main" xmlns="" id="{CE43F05F-7F8E-C1C6-0475-33D5742F8081}"/>
               </a:ext>
             </a:extLst>
           </p:cNvPr>
@@ -22136,7 +22188,7 @@
           <p:cNvPr id="6" name="Oval 5">
             <a:extLst>
               <a:ext uri="{FF2B5EF4-FFF2-40B4-BE49-F238E27FC236}">
-                <a16:creationId xmlns:a16="http://schemas.microsoft.com/office/drawing/2014/main" id="{EC7CB4A1-5BA2-ACBC-ECDC-3953918CC739}"/>
+                <a16:creationId xmlns:a16="http://schemas.microsoft.com/office/drawing/2014/main" xmlns="" id="{EC7CB4A1-5BA2-ACBC-ECDC-3953918CC739}"/>
               </a:ext>
             </a:extLst>
           </p:cNvPr>
@@ -22186,7 +22238,7 @@
           <p:cNvPr id="8" name="Straight Arrow Connector 7">
             <a:extLst>
               <a:ext uri="{FF2B5EF4-FFF2-40B4-BE49-F238E27FC236}">
-                <a16:creationId xmlns:a16="http://schemas.microsoft.com/office/drawing/2014/main" id="{72737C87-E7FD-8A77-4612-A9D10C002AFF}"/>
+                <a16:creationId xmlns:a16="http://schemas.microsoft.com/office/drawing/2014/main" xmlns="" id="{72737C87-E7FD-8A77-4612-A9D10C002AFF}"/>
               </a:ext>
             </a:extLst>
           </p:cNvPr>
@@ -22231,7 +22283,7 @@
           <p:cNvPr id="10" name="Straight Arrow Connector 9">
             <a:extLst>
               <a:ext uri="{FF2B5EF4-FFF2-40B4-BE49-F238E27FC236}">
-                <a16:creationId xmlns:a16="http://schemas.microsoft.com/office/drawing/2014/main" id="{3BB2E5A3-785D-063F-0B32-4CED79FFA761}"/>
+                <a16:creationId xmlns:a16="http://schemas.microsoft.com/office/drawing/2014/main" xmlns="" id="{3BB2E5A3-785D-063F-0B32-4CED79FFA761}"/>
               </a:ext>
             </a:extLst>
           </p:cNvPr>
@@ -22740,7 +22792,7 @@
           <p:cNvPr id="4" name="TextBox 3">
             <a:extLst>
               <a:ext uri="{FF2B5EF4-FFF2-40B4-BE49-F238E27FC236}">
-                <a16:creationId xmlns:a16="http://schemas.microsoft.com/office/drawing/2014/main" id="{0D5B6A1F-FDE2-5F44-379B-672403C45C47}"/>
+                <a16:creationId xmlns:a16="http://schemas.microsoft.com/office/drawing/2014/main" xmlns="" id="{0D5B6A1F-FDE2-5F44-379B-672403C45C47}"/>
               </a:ext>
             </a:extLst>
           </p:cNvPr>
@@ -22790,7 +22842,7 @@
           <p:cNvPr id="6" name="Picture 5">
             <a:extLst>
               <a:ext uri="{FF2B5EF4-FFF2-40B4-BE49-F238E27FC236}">
-                <a16:creationId xmlns:a16="http://schemas.microsoft.com/office/drawing/2014/main" id="{3CB0CD11-8F05-E366-B31F-B78C77054F5B}"/>
+                <a16:creationId xmlns:a16="http://schemas.microsoft.com/office/drawing/2014/main" xmlns="" id="{3CB0CD11-8F05-E366-B31F-B78C77054F5B}"/>
               </a:ext>
             </a:extLst>
           </p:cNvPr>
